--- a/system-design-101/vi/lessons/sd-07-009/slides/sd-07-009.pptx
+++ b/system-design-101/vi/lessons/sd-07-009/slides/sd-07-009.pptx
@@ -5568,18 +5568,434 @@
       </p:sp>
       <p:sp>
         <p:nvSpPr>
-          <p:cNvPr id="4" name="Text 2"/>
-          <p:cNvSpPr/>
-          <p:nvPr/>
-        </p:nvSpPr>
-        <p:spPr>
-          <a:xfrm>
-            <a:off x="1104900" y="2762250"/>
-            <a:ext cx="4191000" cy="666750"/>
+          <p:cNvPr id="4" name="Shape 2"/>
+          <p:cNvSpPr/>
+          <p:nvPr/>
+        </p:nvSpPr>
+        <p:spPr>
+          <a:xfrm>
+            <a:off x="933450" y="9429750"/>
+            <a:ext cx="114300" cy="114300"/>
+          </a:xfrm>
+          <a:prstGeom prst="ellipse">
+            <a:avLst/>
+          </a:prstGeom>
+          <a:solidFill>
+            <a:srgbClr val="F3EEE3"/>
+          </a:solidFill>
+          <a:ln w="19050">
+            <a:solidFill>
+              <a:srgbClr val="F3EEE3"/>
+            </a:solidFill>
+            <a:prstDash val="solid"/>
+          </a:ln>
+        </p:spPr>
+      </p:sp>
+      <p:sp>
+        <p:nvSpPr>
+          <p:cNvPr id="5" name="Shape 3"/>
+          <p:cNvSpPr/>
+          <p:nvPr/>
+        </p:nvSpPr>
+        <p:spPr>
+          <a:xfrm>
+            <a:off x="1257300" y="9429750"/>
+            <a:ext cx="114300" cy="114300"/>
+          </a:xfrm>
+          <a:prstGeom prst="ellipse">
+            <a:avLst/>
+          </a:prstGeom>
+          <a:solidFill>
+            <a:srgbClr val="F3EEE3"/>
+          </a:solidFill>
+          <a:ln w="19050">
+            <a:solidFill>
+              <a:srgbClr val="F3EEE3"/>
+            </a:solidFill>
+            <a:prstDash val="solid"/>
+          </a:ln>
+        </p:spPr>
+      </p:sp>
+      <p:sp>
+        <p:nvSpPr>
+          <p:cNvPr id="6" name="Shape 4"/>
+          <p:cNvSpPr/>
+          <p:nvPr/>
+        </p:nvSpPr>
+        <p:spPr>
+          <a:xfrm>
+            <a:off x="1581150" y="9429750"/>
+            <a:ext cx="114300" cy="114300"/>
+          </a:xfrm>
+          <a:prstGeom prst="ellipse">
+            <a:avLst/>
+          </a:prstGeom>
+          <a:solidFill>
+            <a:srgbClr val="F3EEE3"/>
+          </a:solidFill>
+          <a:ln w="19050">
+            <a:solidFill>
+              <a:srgbClr val="F3EEE3"/>
+            </a:solidFill>
+            <a:prstDash val="solid"/>
+          </a:ln>
+        </p:spPr>
+      </p:sp>
+      <p:sp>
+        <p:nvSpPr>
+          <p:cNvPr id="7" name="Shape 5"/>
+          <p:cNvSpPr/>
+          <p:nvPr/>
+        </p:nvSpPr>
+        <p:spPr>
+          <a:xfrm>
+            <a:off x="1866900" y="9391650"/>
+            <a:ext cx="190500" cy="190500"/>
+          </a:xfrm>
+          <a:prstGeom prst="ellipse">
+            <a:avLst/>
+          </a:prstGeom>
+          <a:solidFill>
+            <a:srgbClr val="FF6A4D"/>
+          </a:solidFill>
+          <a:ln w="19050">
+            <a:solidFill>
+              <a:srgbClr val="FF6A4D"/>
+            </a:solidFill>
+            <a:prstDash val="solid"/>
+          </a:ln>
+        </p:spPr>
+      </p:sp>
+      <p:sp>
+        <p:nvSpPr>
+          <p:cNvPr id="8" name="Shape 6"/>
+          <p:cNvSpPr/>
+          <p:nvPr/>
+        </p:nvSpPr>
+        <p:spPr>
+          <a:xfrm>
+            <a:off x="2228850" y="9429750"/>
+            <a:ext cx="114300" cy="114300"/>
+          </a:xfrm>
+          <a:prstGeom prst="ellipse">
+            <a:avLst/>
+          </a:prstGeom>
+          <a:solidFill>
+            <a:srgbClr val="14161C"/>
+          </a:solidFill>
+          <a:ln w="19050">
+            <a:solidFill>
+              <a:srgbClr val="8A867C"/>
+            </a:solidFill>
+            <a:prstDash val="solid"/>
+          </a:ln>
+        </p:spPr>
+      </p:sp>
+      <p:sp>
+        <p:nvSpPr>
+          <p:cNvPr id="9" name="Shape 7"/>
+          <p:cNvSpPr/>
+          <p:nvPr/>
+        </p:nvSpPr>
+        <p:spPr>
+          <a:xfrm>
+            <a:off x="2552700" y="9429750"/>
+            <a:ext cx="114300" cy="114300"/>
+          </a:xfrm>
+          <a:prstGeom prst="ellipse">
+            <a:avLst/>
+          </a:prstGeom>
+          <a:solidFill>
+            <a:srgbClr val="14161C"/>
+          </a:solidFill>
+          <a:ln w="19050">
+            <a:solidFill>
+              <a:srgbClr val="8A867C"/>
+            </a:solidFill>
+            <a:prstDash val="solid"/>
+          </a:ln>
+        </p:spPr>
+      </p:sp>
+      <p:sp>
+        <p:nvSpPr>
+          <p:cNvPr id="10" name="Shape 8"/>
+          <p:cNvSpPr/>
+          <p:nvPr/>
+        </p:nvSpPr>
+        <p:spPr>
+          <a:xfrm>
+            <a:off x="2876550" y="9429750"/>
+            <a:ext cx="114300" cy="114300"/>
+          </a:xfrm>
+          <a:prstGeom prst="ellipse">
+            <a:avLst/>
+          </a:prstGeom>
+          <a:solidFill>
+            <a:srgbClr val="14161C"/>
+          </a:solidFill>
+          <a:ln w="19050">
+            <a:solidFill>
+              <a:srgbClr val="8A867C"/>
+            </a:solidFill>
+            <a:prstDash val="solid"/>
+          </a:ln>
+        </p:spPr>
+      </p:sp>
+      <p:sp>
+        <p:nvSpPr>
+          <p:cNvPr id="11" name="Shape 9"/>
+          <p:cNvSpPr/>
+          <p:nvPr/>
+        </p:nvSpPr>
+        <p:spPr>
+          <a:xfrm>
+            <a:off x="3200400" y="9429750"/>
+            <a:ext cx="114300" cy="114300"/>
+          </a:xfrm>
+          <a:prstGeom prst="ellipse">
+            <a:avLst/>
+          </a:prstGeom>
+          <a:solidFill>
+            <a:srgbClr val="14161C"/>
+          </a:solidFill>
+          <a:ln w="19050">
+            <a:solidFill>
+              <a:srgbClr val="8A867C"/>
+            </a:solidFill>
+            <a:prstDash val="solid"/>
+          </a:ln>
+        </p:spPr>
+      </p:sp>
+      <p:sp>
+        <p:nvSpPr>
+          <p:cNvPr id="12" name="Text 10"/>
+          <p:cNvSpPr/>
+          <p:nvPr/>
+        </p:nvSpPr>
+        <p:spPr>
+          <a:xfrm>
+            <a:off x="914400" y="9715500"/>
+            <a:ext cx="6667500" cy="285750"/>
+          </a:xfrm>
+          <a:prstGeom prst="rect">
+            <a:avLst/>
+          </a:prstGeom>
+          <a:noFill/>
+          <a:ln/>
+        </p:spPr>
+        <p:txBody>
+          <a:bodyPr wrap="square" lIns="0" tIns="0" rIns="0" bIns="0" rtlCol="0" anchor="t"/>
+          <a:lstStyle/>
+          <a:p>
+            <a:pPr algn="l" indent="0" marL="0">
+              <a:buNone/>
+            </a:pPr>
+            <a:r>
+              <a:rPr lang="en-US" sz="1650" dirty="0" spc="-12" kern="0">
+                <a:solidFill>
+                  <a:srgbClr val="9AA0B5"/>
+                </a:solidFill>
+                <a:latin typeface="Be Vietnam Pro" pitchFamily="34" charset="0"/>
+                <a:ea typeface="Be Vietnam Pro" pitchFamily="34" charset="-122"/>
+                <a:cs typeface="Be Vietnam Pro" pitchFamily="34" charset="-120"/>
+              </a:rPr>
+              <a:t>System</a:t>
+            </a:r>
+            <a:r>
+              <a:rPr lang="en-US" sz="1650" dirty="0" spc="0" kern="0">
+                <a:solidFill>
+                  <a:srgbClr val="9AA0B5"/>
+                </a:solidFill>
+                <a:latin typeface="Be Vietnam Pro" pitchFamily="34" charset="0"/>
+                <a:ea typeface="Be Vietnam Pro" pitchFamily="34" charset="-122"/>
+                <a:cs typeface="Be Vietnam Pro" pitchFamily="34" charset="-120"/>
+              </a:rPr>
+              <a:t> Design</a:t>
+            </a:r>
+            <a:r>
+              <a:rPr lang="en-US" sz="1650" dirty="0" spc="1" kern="0">
+                <a:solidFill>
+                  <a:srgbClr val="9AA0B5"/>
+                </a:solidFill>
+                <a:latin typeface="Be Vietnam Pro" pitchFamily="34" charset="0"/>
+                <a:ea typeface="Be Vietnam Pro" pitchFamily="34" charset="-122"/>
+                <a:cs typeface="Be Vietnam Pro" pitchFamily="34" charset="-120"/>
+              </a:rPr>
+              <a:t> 101</a:t>
+            </a:r>
+            <a:r>
+              <a:rPr lang="en-US" sz="1650" dirty="0" spc="0" kern="0">
+                <a:solidFill>
+                  <a:srgbClr val="9AA0B5"/>
+                </a:solidFill>
+                <a:latin typeface="Be Vietnam Pro" pitchFamily="34" charset="0"/>
+                <a:ea typeface="Be Vietnam Pro" pitchFamily="34" charset="-122"/>
+                <a:cs typeface="Be Vietnam Pro" pitchFamily="34" charset="-120"/>
+              </a:rPr>
+              <a:t> ·</a:t>
+            </a:r>
+            <a:r>
+              <a:rPr lang="en-US" sz="1650" dirty="0" spc="1" kern="0">
+                <a:solidFill>
+                  <a:srgbClr val="9AA0B5"/>
+                </a:solidFill>
+                <a:latin typeface="Be Vietnam Pro" pitchFamily="34" charset="0"/>
+                <a:ea typeface="Be Vietnam Pro" pitchFamily="34" charset="-122"/>
+                <a:cs typeface="Be Vietnam Pro" pitchFamily="34" charset="-120"/>
+              </a:rPr>
+              <a:t> Bài</a:t>
+            </a:r>
+            <a:r>
+              <a:rPr lang="en-US" sz="1650" dirty="0" spc="2" kern="0">
+                <a:solidFill>
+                  <a:srgbClr val="9AA0B5"/>
+                </a:solidFill>
+                <a:latin typeface="Be Vietnam Pro" pitchFamily="34" charset="0"/>
+                <a:ea typeface="Be Vietnam Pro" pitchFamily="34" charset="-122"/>
+                <a:cs typeface="Be Vietnam Pro" pitchFamily="34" charset="-120"/>
+              </a:rPr>
+              <a:t> 09</a:t>
+            </a:r>
+            <a:r>
+              <a:rPr lang="en-US" sz="1650" dirty="0" spc="-1" kern="0">
+                <a:solidFill>
+                  <a:srgbClr val="9AA0B5"/>
+                </a:solidFill>
+                <a:latin typeface="Be Vietnam Pro" pitchFamily="34" charset="0"/>
+                <a:ea typeface="Be Vietnam Pro" pitchFamily="34" charset="-122"/>
+                <a:cs typeface="Be Vietnam Pro" pitchFamily="34" charset="-120"/>
+              </a:rPr>
+              <a:t> ·</a:t>
+            </a:r>
+            <a:r>
+              <a:rPr lang="en-US" sz="1650" dirty="0" spc="1" kern="0">
+                <a:solidFill>
+                  <a:srgbClr val="9AA0B5"/>
+                </a:solidFill>
+                <a:latin typeface="Be Vietnam Pro" pitchFamily="34" charset="0"/>
+                <a:ea typeface="Be Vietnam Pro" pitchFamily="34" charset="-122"/>
+                <a:cs typeface="Be Vietnam Pro" pitchFamily="34" charset="-120"/>
+              </a:rPr>
+              <a:t> 04/08</a:t>
+            </a:r>
+            <a:endParaRPr lang="en-US" sz="1650" dirty="0"/>
+          </a:p>
+        </p:txBody>
+      </p:sp>
+      <p:sp>
+        <p:nvSpPr>
+          <p:cNvPr id="13" name="Connector line-1792400517127-197147380"/>
+          <p:cNvSpPr/>
+          <p:nvPr/>
+        </p:nvSpPr>
+        <p:spPr>
+          <a:xfrm>
+            <a:off x="2762250" y="3371850"/>
+            <a:ext cx="0" cy="5486400"/>
+          </a:xfrm>
+          <a:prstGeom prst="line">
+            <a:avLst/>
+          </a:prstGeom>
+          <a:noFill/>
+          <a:ln w="28575">
+            <a:solidFill>
+              <a:srgbClr val="3A3F52"/>
+            </a:solidFill>
+            <a:prstDash val="solid"/>
+            <a:headEnd type="none"/>
+            <a:tailEnd type="none"/>
+          </a:ln>
+        </p:spPr>
+      </p:sp>
+      <p:sp>
+        <p:nvSpPr>
+          <p:cNvPr id="14" name="Connector line-1792400517129-735423147"/>
+          <p:cNvSpPr/>
+          <p:nvPr/>
+        </p:nvSpPr>
+        <p:spPr>
+          <a:xfrm>
+            <a:off x="6953250" y="3371850"/>
+            <a:ext cx="0" cy="5486400"/>
+          </a:xfrm>
+          <a:prstGeom prst="line">
+            <a:avLst/>
+          </a:prstGeom>
+          <a:noFill/>
+          <a:ln w="28575">
+            <a:solidFill>
+              <a:srgbClr val="3A3F52"/>
+            </a:solidFill>
+            <a:prstDash val="solid"/>
+            <a:headEnd type="none"/>
+            <a:tailEnd type="none"/>
+          </a:ln>
+        </p:spPr>
+      </p:sp>
+      <p:sp>
+        <p:nvSpPr>
+          <p:cNvPr id="15" name="Connector line-1792400517130-371484973"/>
+          <p:cNvSpPr/>
+          <p:nvPr/>
+        </p:nvSpPr>
+        <p:spPr>
+          <a:xfrm>
+            <a:off x="11144250" y="3371850"/>
+            <a:ext cx="0" cy="5486400"/>
+          </a:xfrm>
+          <a:prstGeom prst="line">
+            <a:avLst/>
+          </a:prstGeom>
+          <a:noFill/>
+          <a:ln w="28575">
+            <a:solidFill>
+              <a:srgbClr val="3A3F52"/>
+            </a:solidFill>
+            <a:prstDash val="solid"/>
+            <a:headEnd type="none"/>
+            <a:tailEnd type="none"/>
+          </a:ln>
+        </p:spPr>
+      </p:sp>
+      <p:sp>
+        <p:nvSpPr>
+          <p:cNvPr id="16" name="Connector line-1792400517130-6573186"/>
+          <p:cNvSpPr/>
+          <p:nvPr/>
+        </p:nvSpPr>
+        <p:spPr>
+          <a:xfrm>
+            <a:off x="15335250" y="3371850"/>
+            <a:ext cx="0" cy="5486400"/>
+          </a:xfrm>
+          <a:prstGeom prst="line">
+            <a:avLst/>
+          </a:prstGeom>
+          <a:noFill/>
+          <a:ln w="28575">
+            <a:solidFill>
+              <a:srgbClr val="3A3F52"/>
+            </a:solidFill>
+            <a:prstDash val="solid"/>
+            <a:headEnd type="none"/>
+            <a:tailEnd type="none"/>
+          </a:ln>
+        </p:spPr>
+      </p:sp>
+      <p:sp>
+        <p:nvSpPr>
+          <p:cNvPr id="17" name="Text 15"/>
+          <p:cNvSpPr/>
+          <p:nvPr/>
+        </p:nvSpPr>
+        <p:spPr>
+          <a:xfrm>
+            <a:off x="952500" y="2762250"/>
+            <a:ext cx="3619500" cy="609600"/>
           </a:xfrm>
           <a:prstGeom prst="roundRect">
             <a:avLst>
-              <a:gd name="adj" fmla="val 28571"/>
+              <a:gd name="adj" fmla="val 31250"/>
             </a:avLst>
           </a:prstGeom>
           <a:solidFill>
@@ -5600,7 +6016,7 @@
               <a:buNone/>
             </a:pPr>
             <a:r>
-              <a:rPr lang="en-US" sz="2100" b="1" dirty="0" spc="-2" kern="0">
+              <a:rPr lang="en-US" sz="1950" b="1" dirty="0" spc="-2" kern="0">
                 <a:solidFill>
                   <a:srgbClr val="7C93FF"/>
                 </a:solidFill>
@@ -5608,10 +6024,10 @@
                 <a:ea typeface="Be Vietnam Pro" pitchFamily="34" charset="-122"/>
                 <a:cs typeface="Be Vietnam Pro" pitchFamily="34" charset="-120"/>
               </a:rPr>
-              <a:t>Ứng</a:t>
-            </a:r>
-            <a:r>
-              <a:rPr lang="en-US" sz="2100" b="1" dirty="0" spc="-3" kern="0">
+              <a:t>Ứng dụng của</a:t>
+            </a:r>
+            <a:r>
+              <a:rPr lang="en-US" sz="1950" b="1" dirty="0" spc="-1" kern="0">
                 <a:solidFill>
                   <a:srgbClr val="7C93FF"/>
                 </a:solidFill>
@@ -5619,26 +6035,26 @@
                 <a:ea typeface="Be Vietnam Pro" pitchFamily="34" charset="-122"/>
                 <a:cs typeface="Be Vietnam Pro" pitchFamily="34" charset="-120"/>
               </a:rPr>
-              <a:t> dụng của Alice</a:t>
-            </a:r>
-            <a:endParaRPr lang="en-US" sz="2100" dirty="0"/>
+              <a:t> Alice</a:t>
+            </a:r>
+            <a:endParaRPr lang="en-US" sz="1950" dirty="0"/>
           </a:p>
         </p:txBody>
       </p:sp>
       <p:sp>
         <p:nvSpPr>
-          <p:cNvPr id="5" name="Text 3"/>
-          <p:cNvSpPr/>
-          <p:nvPr/>
-        </p:nvSpPr>
-        <p:spPr>
-          <a:xfrm>
-            <a:off x="7048500" y="2762250"/>
-            <a:ext cx="4191000" cy="666750"/>
+          <p:cNvPr id="18" name="Text 16"/>
+          <p:cNvSpPr/>
+          <p:nvPr/>
+        </p:nvSpPr>
+        <p:spPr>
+          <a:xfrm>
+            <a:off x="5143500" y="2762250"/>
+            <a:ext cx="3619500" cy="609600"/>
           </a:xfrm>
           <a:prstGeom prst="roundRect">
             <a:avLst>
-              <a:gd name="adj" fmla="val 28571"/>
+              <a:gd name="adj" fmla="val 31250"/>
             </a:avLst>
           </a:prstGeom>
           <a:solidFill>
@@ -5659,7 +6075,7 @@
               <a:buNone/>
             </a:pPr>
             <a:r>
-              <a:rPr lang="en-US" sz="2100" b="1" dirty="0" spc="-1" kern="0">
+              <a:rPr lang="en-US" sz="1950" b="1" dirty="0" spc="-1" kern="0">
                 <a:solidFill>
                   <a:srgbClr val="FFB454"/>
                 </a:solidFill>
@@ -5669,24 +6085,105 @@
               </a:rPr>
               <a:t>NPCI</a:t>
             </a:r>
-            <a:endParaRPr lang="en-US" sz="2100" dirty="0"/>
+            <a:endParaRPr lang="en-US" sz="1950" dirty="0"/>
           </a:p>
         </p:txBody>
       </p:sp>
       <p:sp>
         <p:nvSpPr>
-          <p:cNvPr id="6" name="Text 4"/>
-          <p:cNvSpPr/>
-          <p:nvPr/>
-        </p:nvSpPr>
-        <p:spPr>
-          <a:xfrm>
-            <a:off x="12992100" y="2762250"/>
-            <a:ext cx="4191000" cy="666750"/>
+          <p:cNvPr id="19" name="Text 17"/>
+          <p:cNvSpPr/>
+          <p:nvPr/>
+        </p:nvSpPr>
+        <p:spPr>
+          <a:xfrm>
+            <a:off x="9334500" y="2762250"/>
+            <a:ext cx="3619500" cy="609600"/>
           </a:xfrm>
           <a:prstGeom prst="roundRect">
             <a:avLst>
-              <a:gd name="adj" fmla="val 28571"/>
+              <a:gd name="adj" fmla="val 31250"/>
+            </a:avLst>
+          </a:prstGeom>
+          <a:solidFill>
+            <a:srgbClr val="1E212B"/>
+          </a:solidFill>
+          <a:ln w="28575">
+            <a:solidFill>
+              <a:srgbClr val="FF6A4D"/>
+            </a:solidFill>
+            <a:prstDash val="solid"/>
+          </a:ln>
+        </p:spPr>
+        <p:txBody>
+          <a:bodyPr wrap="square" lIns="0" tIns="0" rIns="0" bIns="0" rtlCol="0" anchor="ctr"/>
+          <a:lstStyle/>
+          <a:p>
+            <a:pPr algn="ctr" indent="0" marL="0">
+              <a:buNone/>
+            </a:pPr>
+            <a:r>
+              <a:rPr lang="en-US" sz="1950" b="1" dirty="0" spc="-4" kern="0">
+                <a:solidFill>
+                  <a:srgbClr val="FF6A4D"/>
+                </a:solidFill>
+                <a:latin typeface="Be Vietnam Pro" pitchFamily="34" charset="0"/>
+                <a:ea typeface="Be Vietnam Pro" pitchFamily="34" charset="-122"/>
+                <a:cs typeface="Be Vietnam Pro" pitchFamily="34" charset="-120"/>
+              </a:rPr>
+              <a:t>Ngân</a:t>
+            </a:r>
+            <a:r>
+              <a:rPr lang="en-US" sz="1950" b="1" dirty="0" spc="-3" kern="0">
+                <a:solidFill>
+                  <a:srgbClr val="FF6A4D"/>
+                </a:solidFill>
+                <a:latin typeface="Be Vietnam Pro" pitchFamily="34" charset="0"/>
+                <a:ea typeface="Be Vietnam Pro" pitchFamily="34" charset="-122"/>
+                <a:cs typeface="Be Vietnam Pro" pitchFamily="34" charset="-120"/>
+              </a:rPr>
+              <a:t> hàng</a:t>
+            </a:r>
+            <a:r>
+              <a:rPr lang="en-US" sz="1950" b="1" dirty="0" spc="-2" kern="0">
+                <a:solidFill>
+                  <a:srgbClr val="FF6A4D"/>
+                </a:solidFill>
+                <a:latin typeface="Be Vietnam Pro" pitchFamily="34" charset="0"/>
+                <a:ea typeface="Be Vietnam Pro" pitchFamily="34" charset="-122"/>
+                <a:cs typeface="Be Vietnam Pro" pitchFamily="34" charset="-120"/>
+              </a:rPr>
+              <a:t> của</a:t>
+            </a:r>
+            <a:r>
+              <a:rPr lang="en-US" sz="1950" b="1" dirty="0" spc="-1" kern="0">
+                <a:solidFill>
+                  <a:srgbClr val="FF6A4D"/>
+                </a:solidFill>
+                <a:latin typeface="Be Vietnam Pro" pitchFamily="34" charset="0"/>
+                <a:ea typeface="Be Vietnam Pro" pitchFamily="34" charset="-122"/>
+                <a:cs typeface="Be Vietnam Pro" pitchFamily="34" charset="-120"/>
+              </a:rPr>
+              <a:t> Alice</a:t>
+            </a:r>
+            <a:endParaRPr lang="en-US" sz="1950" dirty="0"/>
+          </a:p>
+        </p:txBody>
+      </p:sp>
+      <p:sp>
+        <p:nvSpPr>
+          <p:cNvPr id="20" name="Text 18"/>
+          <p:cNvSpPr/>
+          <p:nvPr/>
+        </p:nvSpPr>
+        <p:spPr>
+          <a:xfrm>
+            <a:off x="13525500" y="2762250"/>
+            <a:ext cx="3619500" cy="609600"/>
+          </a:xfrm>
+          <a:prstGeom prst="roundRect">
+            <a:avLst>
+              <a:gd name="adj" fmla="val 31250"/>
             </a:avLst>
           </a:prstGeom>
           <a:solidFill>
@@ -5707,7 +6204,7 @@
               <a:buNone/>
             </a:pPr>
             <a:r>
-              <a:rPr lang="en-US" sz="2100" b="1" dirty="0" spc="-5" kern="0">
+              <a:rPr lang="en-US" sz="1950" b="1" dirty="0" spc="-4" kern="0">
                 <a:solidFill>
                   <a:srgbClr val="3DD6A0"/>
                 </a:solidFill>
@@ -5718,7 +6215,7 @@
               <a:t>Ngân</a:t>
             </a:r>
             <a:r>
-              <a:rPr lang="en-US" sz="2100" b="1" dirty="0" spc="-3" kern="0">
+              <a:rPr lang="en-US" sz="1950" b="1" dirty="0" spc="-3" kern="0">
                 <a:solidFill>
                   <a:srgbClr val="3DD6A0"/>
                 </a:solidFill>
@@ -5726,10 +6223,10 @@
                 <a:ea typeface="Be Vietnam Pro" pitchFamily="34" charset="-122"/>
                 <a:cs typeface="Be Vietnam Pro" pitchFamily="34" charset="-120"/>
               </a:rPr>
-              <a:t> hàng của</a:t>
-            </a:r>
-            <a:r>
-              <a:rPr lang="en-US" sz="2100" b="1" dirty="0" spc="-5" kern="0">
+              <a:t> hàng</a:t>
+            </a:r>
+            <a:r>
+              <a:rPr lang="en-US" sz="1950" b="1" dirty="0" spc="-2" kern="0">
                 <a:solidFill>
                   <a:srgbClr val="3DD6A0"/>
                 </a:solidFill>
@@ -5737,97 +6234,58 @@
                 <a:ea typeface="Be Vietnam Pro" pitchFamily="34" charset="-122"/>
                 <a:cs typeface="Be Vietnam Pro" pitchFamily="34" charset="-120"/>
               </a:rPr>
+              <a:t> của</a:t>
+            </a:r>
+            <a:r>
+              <a:rPr lang="en-US" sz="1950" b="1" dirty="0" spc="-5" kern="0">
+                <a:solidFill>
+                  <a:srgbClr val="3DD6A0"/>
+                </a:solidFill>
+                <a:latin typeface="Be Vietnam Pro" pitchFamily="34" charset="0"/>
+                <a:ea typeface="Be Vietnam Pro" pitchFamily="34" charset="-122"/>
+                <a:cs typeface="Be Vietnam Pro" pitchFamily="34" charset="-120"/>
+              </a:rPr>
               <a:t> Bob</a:t>
             </a:r>
-            <a:endParaRPr lang="en-US" sz="2100" dirty="0"/>
+            <a:endParaRPr lang="en-US" sz="1950" dirty="0"/>
           </a:p>
         </p:txBody>
       </p:sp>
       <p:sp>
         <p:nvSpPr>
-          <p:cNvPr id="7" name="Connector line-1792380649920-98217761"/>
-          <p:cNvSpPr/>
-          <p:nvPr/>
-        </p:nvSpPr>
-        <p:spPr>
-          <a:xfrm>
-            <a:off x="3200400" y="3429000"/>
-            <a:ext cx="0" cy="5143500"/>
+          <p:cNvPr id="21" name="Connector line-1792400517147-599114410"/>
+          <p:cNvSpPr/>
+          <p:nvPr/>
+        </p:nvSpPr>
+        <p:spPr>
+          <a:xfrm>
+            <a:off x="2762250" y="3810000"/>
+            <a:ext cx="4114800" cy="0"/>
           </a:xfrm>
           <a:prstGeom prst="line">
             <a:avLst/>
           </a:prstGeom>
           <a:noFill/>
-          <a:ln w="28575">
+          <a:ln w="38100">
             <a:solidFill>
-              <a:srgbClr val="3A3F52"/>
+              <a:srgbClr val="3DD6A0"/>
             </a:solidFill>
             <a:prstDash val="solid"/>
             <a:headEnd type="none"/>
-            <a:tailEnd type="none"/>
+            <a:tailEnd type="triangle" w="lg" len="lg"/>
           </a:ln>
         </p:spPr>
       </p:sp>
       <p:sp>
         <p:nvSpPr>
-          <p:cNvPr id="8" name="Connector line-1792380649921-578321785"/>
-          <p:cNvSpPr/>
-          <p:nvPr/>
-        </p:nvSpPr>
-        <p:spPr>
-          <a:xfrm>
-            <a:off x="9144000" y="3429000"/>
-            <a:ext cx="0" cy="5143500"/>
-          </a:xfrm>
-          <a:prstGeom prst="line">
-            <a:avLst/>
-          </a:prstGeom>
-          <a:noFill/>
-          <a:ln w="28575">
-            <a:solidFill>
-              <a:srgbClr val="3A3F52"/>
-            </a:solidFill>
-            <a:prstDash val="solid"/>
-            <a:headEnd type="none"/>
-            <a:tailEnd type="none"/>
-          </a:ln>
-        </p:spPr>
-      </p:sp>
-      <p:sp>
-        <p:nvSpPr>
-          <p:cNvPr id="9" name="Connector line-1792380649921-851596992"/>
-          <p:cNvSpPr/>
-          <p:nvPr/>
-        </p:nvSpPr>
-        <p:spPr>
-          <a:xfrm>
-            <a:off x="15087600" y="3429000"/>
-            <a:ext cx="0" cy="5143500"/>
-          </a:xfrm>
-          <a:prstGeom prst="line">
-            <a:avLst/>
-          </a:prstGeom>
-          <a:noFill/>
-          <a:ln w="28575">
-            <a:solidFill>
-              <a:srgbClr val="3A3F52"/>
-            </a:solidFill>
-            <a:prstDash val="solid"/>
-            <a:headEnd type="none"/>
-            <a:tailEnd type="none"/>
-          </a:ln>
-        </p:spPr>
-      </p:sp>
-      <p:sp>
-        <p:nvSpPr>
-          <p:cNvPr id="10" name="Text 8"/>
-          <p:cNvSpPr/>
-          <p:nvPr/>
-        </p:nvSpPr>
-        <p:spPr>
-          <a:xfrm>
-            <a:off x="3505200" y="3581400"/>
-            <a:ext cx="5334000" cy="342900"/>
+          <p:cNvPr id="22" name="Text 20"/>
+          <p:cNvSpPr/>
+          <p:nvPr/>
+        </p:nvSpPr>
+        <p:spPr>
+          <a:xfrm>
+            <a:off x="2762250" y="3429000"/>
+            <a:ext cx="4191000" cy="323850"/>
           </a:xfrm>
           <a:prstGeom prst="rect">
             <a:avLst/>
@@ -5914,14 +6372,14 @@
       </p:sp>
       <p:sp>
         <p:nvSpPr>
-          <p:cNvPr id="11" name="Connector line-1792380649923-441061613"/>
-          <p:cNvSpPr/>
-          <p:nvPr/>
-        </p:nvSpPr>
-        <p:spPr>
-          <a:xfrm>
-            <a:off x="3200400" y="4000500"/>
-            <a:ext cx="5753100" cy="0"/>
+          <p:cNvPr id="23" name="Connector line-1792400517154-726890627"/>
+          <p:cNvSpPr/>
+          <p:nvPr/>
+        </p:nvSpPr>
+        <p:spPr>
+          <a:xfrm>
+            <a:off x="6953250" y="4419600"/>
+            <a:ext cx="8305800" cy="0"/>
           </a:xfrm>
           <a:prstGeom prst="line">
             <a:avLst/>
@@ -5933,58 +6391,20 @@
             </a:solidFill>
             <a:prstDash val="solid"/>
             <a:headEnd type="none"/>
-            <a:tailEnd type="none"/>
+            <a:tailEnd type="triangle" w="lg" len="lg"/>
           </a:ln>
         </p:spPr>
       </p:sp>
       <p:sp>
         <p:nvSpPr>
-          <p:cNvPr id="12" name="Shape 10"/>
-          <p:cNvSpPr/>
-          <p:nvPr/>
-        </p:nvSpPr>
-        <p:spPr>
-          <a:xfrm>
-            <a:off x="8934450" y="3886200"/>
-            <a:ext cx="209550" cy="228600"/>
-          </a:xfrm>
-          <a:custGeom>
-            <a:avLst/>
-            <a:gdLst/>
-            <a:ahLst/>
-            <a:cxnLst/>
-            <a:rect l="l" t="t" r="r" b="b"/>
-            <a:pathLst>
-              <a:path w="209550" h="228600">
-                <a:moveTo>
-                  <a:pt x="209550" y="114300"/>
-                </a:moveTo>
-                <a:lnTo>
-                  <a:pt x="0" y="0"/>
-                </a:lnTo>
-                <a:lnTo>
-                  <a:pt x="0" y="228600"/>
-                </a:lnTo>
-                <a:close/>
-              </a:path>
-            </a:pathLst>
-          </a:custGeom>
-          <a:solidFill>
-            <a:srgbClr val="3DD6A0"/>
-          </a:solidFill>
-          <a:ln/>
-        </p:spPr>
-      </p:sp>
-      <p:sp>
-        <p:nvSpPr>
-          <p:cNvPr id="13" name="Text 11"/>
-          <p:cNvSpPr/>
-          <p:nvPr/>
-        </p:nvSpPr>
-        <p:spPr>
-          <a:xfrm>
-            <a:off x="9448800" y="4438650"/>
-            <a:ext cx="5334000" cy="342900"/>
+          <p:cNvPr id="24" name="Text 22"/>
+          <p:cNvSpPr/>
+          <p:nvPr/>
+        </p:nvSpPr>
+        <p:spPr>
+          <a:xfrm>
+            <a:off x="11334750" y="4057650"/>
+            <a:ext cx="3810000" cy="323850"/>
           </a:xfrm>
           <a:prstGeom prst="rect">
             <a:avLst/>
@@ -6060,14 +6480,14 @@
       </p:sp>
       <p:sp>
         <p:nvSpPr>
-          <p:cNvPr id="14" name="Connector line-1792380649926-652377397"/>
-          <p:cNvSpPr/>
-          <p:nvPr/>
-        </p:nvSpPr>
-        <p:spPr>
-          <a:xfrm>
-            <a:off x="9144000" y="4857750"/>
-            <a:ext cx="5753100" cy="0"/>
+          <p:cNvPr id="25" name="Connector line-1792400517157-96964177"/>
+          <p:cNvSpPr/>
+          <p:nvPr/>
+        </p:nvSpPr>
+        <p:spPr>
+          <a:xfrm>
+            <a:off x="6953250" y="5029200"/>
+            <a:ext cx="4114800" cy="0"/>
           </a:xfrm>
           <a:prstGeom prst="line">
             <a:avLst/>
@@ -6079,62 +6499,107 @@
             </a:solidFill>
             <a:prstDash val="solid"/>
             <a:headEnd type="none"/>
-            <a:tailEnd type="none"/>
+            <a:tailEnd type="triangle" w="lg" len="lg"/>
           </a:ln>
         </p:spPr>
       </p:sp>
       <p:sp>
         <p:nvSpPr>
-          <p:cNvPr id="15" name="Shape 13"/>
-          <p:cNvSpPr/>
-          <p:nvPr/>
-        </p:nvSpPr>
-        <p:spPr>
-          <a:xfrm>
-            <a:off x="14878050" y="4743450"/>
-            <a:ext cx="209550" cy="228600"/>
-          </a:xfrm>
-          <a:custGeom>
-            <a:avLst/>
-            <a:gdLst/>
-            <a:ahLst/>
-            <a:cxnLst/>
-            <a:rect l="l" t="t" r="r" b="b"/>
-            <a:pathLst>
-              <a:path w="209550" h="228600">
-                <a:moveTo>
-                  <a:pt x="209550" y="114300"/>
-                </a:moveTo>
-                <a:lnTo>
-                  <a:pt x="0" y="0"/>
-                </a:lnTo>
-                <a:lnTo>
-                  <a:pt x="0" y="228600"/>
-                </a:lnTo>
-                <a:close/>
-              </a:path>
-            </a:pathLst>
-          </a:custGeom>
-          <a:solidFill>
-            <a:srgbClr val="3DD6A0"/>
-          </a:solidFill>
+          <p:cNvPr id="26" name="Text 24"/>
+          <p:cNvSpPr/>
+          <p:nvPr/>
+        </p:nvSpPr>
+        <p:spPr>
+          <a:xfrm>
+            <a:off x="6953250" y="4667250"/>
+            <a:ext cx="4191000" cy="323850"/>
+          </a:xfrm>
+          <a:prstGeom prst="rect">
+            <a:avLst/>
+          </a:prstGeom>
+          <a:noFill/>
           <a:ln/>
         </p:spPr>
-      </p:sp>
-      <p:sp>
-        <p:nvSpPr>
-          <p:cNvPr id="16" name="Text 14"/>
-          <p:cNvSpPr/>
-          <p:nvPr/>
-        </p:nvSpPr>
-        <p:spPr>
-          <a:xfrm>
-            <a:off x="6667500" y="5476875"/>
-            <a:ext cx="4953000" cy="666750"/>
+        <p:txBody>
+          <a:bodyPr wrap="square" lIns="0" tIns="0" rIns="0" bIns="0" rtlCol="0" anchor="t"/>
+          <a:lstStyle/>
+          <a:p>
+            <a:pPr algn="ctr" indent="0" marL="0">
+              <a:buNone/>
+            </a:pPr>
+            <a:r>
+              <a:rPr lang="en-US" sz="1950" dirty="0" spc="-65" kern="0">
+                <a:solidFill>
+                  <a:srgbClr val="F3EEE3"/>
+                </a:solidFill>
+                <a:latin typeface="Be Vietnam Pro" pitchFamily="34" charset="0"/>
+                <a:ea typeface="Be Vietnam Pro" pitchFamily="34" charset="-122"/>
+                <a:cs typeface="Be Vietnam Pro" pitchFamily="34" charset="-120"/>
+              </a:rPr>
+              <a:t>Yêu</a:t>
+            </a:r>
+            <a:r>
+              <a:rPr lang="en-US" sz="1950" dirty="0" spc="-1" kern="0">
+                <a:solidFill>
+                  <a:srgbClr val="F3EEE3"/>
+                </a:solidFill>
+                <a:latin typeface="Be Vietnam Pro" pitchFamily="34" charset="0"/>
+                <a:ea typeface="Be Vietnam Pro" pitchFamily="34" charset="-122"/>
+                <a:cs typeface="Be Vietnam Pro" pitchFamily="34" charset="-120"/>
+              </a:rPr>
+              <a:t> cầu</a:t>
+            </a:r>
+            <a:r>
+              <a:rPr lang="en-US" sz="1950" dirty="0" spc="0" kern="0">
+                <a:solidFill>
+                  <a:srgbClr val="F3EEE3"/>
+                </a:solidFill>
+                <a:latin typeface="Be Vietnam Pro" pitchFamily="34" charset="0"/>
+                <a:ea typeface="Be Vietnam Pro" pitchFamily="34" charset="-122"/>
+                <a:cs typeface="Be Vietnam Pro" pitchFamily="34" charset="-120"/>
+              </a:rPr>
+              <a:t> trừ</a:t>
+            </a:r>
+            <a:r>
+              <a:rPr lang="en-US" sz="1950" dirty="0" spc="3" kern="0">
+                <a:solidFill>
+                  <a:srgbClr val="F3EEE3"/>
+                </a:solidFill>
+                <a:latin typeface="Be Vietnam Pro" pitchFamily="34" charset="0"/>
+                <a:ea typeface="Be Vietnam Pro" pitchFamily="34" charset="-122"/>
+                <a:cs typeface="Be Vietnam Pro" pitchFamily="34" charset="-120"/>
+              </a:rPr>
+              <a:t> 100</a:t>
+            </a:r>
+            <a:r>
+              <a:rPr lang="en-US" sz="1950" dirty="0" spc="-1" kern="0">
+                <a:solidFill>
+                  <a:srgbClr val="F3EEE3"/>
+                </a:solidFill>
+                <a:latin typeface="Be Vietnam Pro" pitchFamily="34" charset="0"/>
+                <a:ea typeface="Be Vietnam Pro" pitchFamily="34" charset="-122"/>
+                <a:cs typeface="Be Vietnam Pro" pitchFamily="34" charset="-120"/>
+              </a:rPr>
+              <a:t> rupee</a:t>
+            </a:r>
+            <a:endParaRPr lang="en-US" sz="1950" dirty="0"/>
+          </a:p>
+        </p:txBody>
+      </p:sp>
+      <p:sp>
+        <p:nvSpPr>
+          <p:cNvPr id="27" name="Text 25"/>
+          <p:cNvSpPr/>
+          <p:nvPr/>
+        </p:nvSpPr>
+        <p:spPr>
+          <a:xfrm>
+            <a:off x="9048750" y="5295900"/>
+            <a:ext cx="4191000" cy="533400"/>
           </a:xfrm>
           <a:prstGeom prst="roundRect">
             <a:avLst>
-              <a:gd name="adj" fmla="val 28571"/>
+              <a:gd name="adj" fmla="val 35714"/>
             </a:avLst>
           </a:prstGeom>
           <a:solidFill>
@@ -6142,7 +6607,7 @@
           </a:solidFill>
           <a:ln w="28575">
             <a:solidFill>
-              <a:srgbClr val="FFB454"/>
+              <a:srgbClr val="FF6A4D"/>
             </a:solidFill>
             <a:prstDash val="solid"/>
           </a:ln>
@@ -6155,20 +6620,42 @@
               <a:buNone/>
             </a:pPr>
             <a:r>
-              <a:rPr lang="en-US" sz="1950" b="1" dirty="0" spc="-35" kern="0">
-                <a:solidFill>
-                  <a:srgbClr val="FFB454"/>
-                </a:solidFill>
-                <a:latin typeface="Be Vietnam Pro" pitchFamily="34" charset="0"/>
-                <a:ea typeface="Be Vietnam Pro" pitchFamily="34" charset="-122"/>
-                <a:cs typeface="Be Vietnam Pro" pitchFamily="34" charset="-120"/>
-              </a:rPr>
-              <a:t>Trừ</a:t>
-            </a:r>
-            <a:r>
-              <a:rPr lang="en-US" sz="1950" b="1" dirty="0" spc="2" kern="0">
-                <a:solidFill>
-                  <a:srgbClr val="FFB454"/>
+              <a:rPr lang="en-US" sz="1950" b="1" dirty="0" spc="-1" kern="0">
+                <a:solidFill>
+                  <a:srgbClr val="FF6A4D"/>
+                </a:solidFill>
+                <a:latin typeface="Be Vietnam Pro" pitchFamily="34" charset="0"/>
+                <a:ea typeface="Be Vietnam Pro" pitchFamily="34" charset="-122"/>
+                <a:cs typeface="Be Vietnam Pro" pitchFamily="34" charset="-120"/>
+              </a:rPr>
+              <a:t>Alice</a:t>
+            </a:r>
+            <a:r>
+              <a:rPr lang="en-US" sz="1950" b="1" dirty="0" spc="1" kern="0">
+                <a:solidFill>
+                  <a:srgbClr val="FF6A4D"/>
+                </a:solidFill>
+                <a:latin typeface="Be Vietnam Pro" pitchFamily="34" charset="0"/>
+                <a:ea typeface="Be Vietnam Pro" pitchFamily="34" charset="-122"/>
+                <a:cs typeface="Be Vietnam Pro" pitchFamily="34" charset="-120"/>
+              </a:rPr>
+              <a:t> bị</a:t>
+            </a:r>
+            <a:r>
+              <a:rPr lang="en-US" sz="1950" b="1" dirty="0" spc="0" kern="0">
+                <a:solidFill>
+                  <a:srgbClr val="FF6A4D"/>
+                </a:solidFill>
+                <a:latin typeface="Be Vietnam Pro" pitchFamily="34" charset="0"/>
+                <a:ea typeface="Be Vietnam Pro" pitchFamily="34" charset="-122"/>
+                <a:cs typeface="Be Vietnam Pro" pitchFamily="34" charset="-120"/>
+              </a:rPr>
+              <a:t> trừ</a:t>
+            </a:r>
+            <a:r>
+              <a:rPr lang="en-US" sz="1950" b="1" dirty="0" spc="1" kern="0">
+                <a:solidFill>
+                  <a:srgbClr val="FF6A4D"/>
                 </a:solidFill>
                 <a:latin typeface="Be Vietnam Pro" pitchFamily="34" charset="0"/>
                 <a:ea typeface="Be Vietnam Pro" pitchFamily="34" charset="-122"/>
@@ -6179,35 +6666,13 @@
             <a:r>
               <a:rPr lang="en-US" sz="1950" b="1" dirty="0" spc="-2" kern="0">
                 <a:solidFill>
-                  <a:srgbClr val="FFB454"/>
+                  <a:srgbClr val="FF6A4D"/>
                 </a:solidFill>
                 <a:latin typeface="Be Vietnam Pro" pitchFamily="34" charset="0"/>
                 <a:ea typeface="Be Vietnam Pro" pitchFamily="34" charset="-122"/>
                 <a:cs typeface="Be Vietnam Pro" pitchFamily="34" charset="-120"/>
               </a:rPr>
               <a:t> rupee</a:t>
-            </a:r>
-            <a:r>
-              <a:rPr lang="en-US" sz="1950" b="1" dirty="0" spc="-4" kern="0">
-                <a:solidFill>
-                  <a:srgbClr val="FFB454"/>
-                </a:solidFill>
-                <a:latin typeface="Be Vietnam Pro" pitchFamily="34" charset="0"/>
-                <a:ea typeface="Be Vietnam Pro" pitchFamily="34" charset="-122"/>
-                <a:cs typeface="Be Vietnam Pro" pitchFamily="34" charset="-120"/>
-              </a:rPr>
-              <a:t> ở</a:t>
-            </a:r>
-            <a:r>
-              <a:rPr lang="en-US" sz="1950" b="1" dirty="0" spc="-1" kern="0">
-                <a:solidFill>
-                  <a:srgbClr val="FFB454"/>
-                </a:solidFill>
-                <a:latin typeface="Be Vietnam Pro" pitchFamily="34" charset="0"/>
-                <a:ea typeface="Be Vietnam Pro" pitchFamily="34" charset="-122"/>
-                <a:cs typeface="Be Vietnam Pro" pitchFamily="34" charset="-120"/>
-              </a:rPr>
-              <a:t> Alice</a:t>
             </a:r>
             <a:endParaRPr lang="en-US" sz="1950" dirty="0"/>
           </a:p>
@@ -6215,14 +6680,39 @@
       </p:sp>
       <p:sp>
         <p:nvSpPr>
-          <p:cNvPr id="17" name="Text 15"/>
-          <p:cNvSpPr/>
-          <p:nvPr/>
-        </p:nvSpPr>
-        <p:spPr>
-          <a:xfrm>
-            <a:off x="9448800" y="6438900"/>
-            <a:ext cx="5334000" cy="342900"/>
+          <p:cNvPr id="28" name="Connector line-1792400517161-184753072"/>
+          <p:cNvSpPr/>
+          <p:nvPr/>
+        </p:nvSpPr>
+        <p:spPr>
+          <a:xfrm flipH="1">
+            <a:off x="7029450" y="6191250"/>
+            <a:ext cx="4114800" cy="0"/>
+          </a:xfrm>
+          <a:prstGeom prst="line">
+            <a:avLst/>
+          </a:prstGeom>
+          <a:noFill/>
+          <a:ln w="38100">
+            <a:solidFill>
+              <a:srgbClr val="FFB454"/>
+            </a:solidFill>
+            <a:prstDash val="solid"/>
+            <a:headEnd type="none"/>
+            <a:tailEnd type="triangle" w="lg" len="lg"/>
+          </a:ln>
+        </p:spPr>
+      </p:sp>
+      <p:sp>
+        <p:nvSpPr>
+          <p:cNvPr id="29" name="Text 27"/>
+          <p:cNvSpPr/>
+          <p:nvPr/>
+        </p:nvSpPr>
+        <p:spPr>
+          <a:xfrm>
+            <a:off x="6953250" y="5829300"/>
+            <a:ext cx="4191000" cy="323850"/>
           </a:xfrm>
           <a:prstGeom prst="rect">
             <a:avLst/>
@@ -6238,6 +6728,17 @@
               <a:buNone/>
             </a:pPr>
             <a:r>
+              <a:rPr lang="en-US" sz="1950" dirty="0" spc="-27" kern="0">
+                <a:solidFill>
+                  <a:srgbClr val="F3EEE3"/>
+                </a:solidFill>
+                <a:latin typeface="Be Vietnam Pro" pitchFamily="34" charset="0"/>
+                <a:ea typeface="Be Vietnam Pro" pitchFamily="34" charset="-122"/>
+                <a:cs typeface="Be Vietnam Pro" pitchFamily="34" charset="-120"/>
+              </a:rPr>
+              <a:t>Xác</a:t>
+            </a:r>
+            <a:r>
               <a:rPr lang="en-US" sz="1950" dirty="0" spc="1" kern="0">
                 <a:solidFill>
                   <a:srgbClr val="F3EEE3"/>
@@ -6246,40 +6747,18 @@
                 <a:ea typeface="Be Vietnam Pro" pitchFamily="34" charset="-122"/>
                 <a:cs typeface="Be Vietnam Pro" pitchFamily="34" charset="-120"/>
               </a:rPr>
-              <a:t>Cộng</a:t>
-            </a:r>
-            <a:r>
-              <a:rPr lang="en-US" sz="1950" dirty="0" spc="3" kern="0">
-                <a:solidFill>
-                  <a:srgbClr val="F3EEE3"/>
-                </a:solidFill>
-                <a:latin typeface="Be Vietnam Pro" pitchFamily="34" charset="0"/>
-                <a:ea typeface="Be Vietnam Pro" pitchFamily="34" charset="-122"/>
-                <a:cs typeface="Be Vietnam Pro" pitchFamily="34" charset="-120"/>
-              </a:rPr>
-              <a:t> 100</a:t>
-            </a:r>
-            <a:r>
-              <a:rPr lang="en-US" sz="1950" dirty="0" spc="-2" kern="0">
-                <a:solidFill>
-                  <a:srgbClr val="F3EEE3"/>
-                </a:solidFill>
-                <a:latin typeface="Be Vietnam Pro" pitchFamily="34" charset="0"/>
-                <a:ea typeface="Be Vietnam Pro" pitchFamily="34" charset="-122"/>
-                <a:cs typeface="Be Vietnam Pro" pitchFamily="34" charset="-120"/>
-              </a:rPr>
-              <a:t> rupee</a:t>
-            </a:r>
-            <a:r>
-              <a:rPr lang="en-US" sz="1950" dirty="0" spc="-1" kern="0">
-                <a:solidFill>
-                  <a:srgbClr val="F3EEE3"/>
-                </a:solidFill>
-                <a:latin typeface="Be Vietnam Pro" pitchFamily="34" charset="0"/>
-                <a:ea typeface="Be Vietnam Pro" pitchFamily="34" charset="-122"/>
-                <a:cs typeface="Be Vietnam Pro" pitchFamily="34" charset="-120"/>
-              </a:rPr>
-              <a:t> cho</a:t>
+              <a:t> nhận</a:t>
+            </a:r>
+            <a:r>
+              <a:rPr lang="en-US" sz="1950" dirty="0" spc="14" kern="0">
+                <a:solidFill>
+                  <a:srgbClr val="F3EEE3"/>
+                </a:solidFill>
+                <a:latin typeface="Be Vietnam Pro" pitchFamily="34" charset="0"/>
+                <a:ea typeface="Be Vietnam Pro" pitchFamily="34" charset="-122"/>
+                <a:cs typeface="Be Vietnam Pro" pitchFamily="34" charset="-120"/>
+              </a:rPr>
+              <a:t> đã</a:t>
             </a:r>
             <a:r>
               <a:rPr lang="en-US" sz="1950" dirty="0" spc="0" kern="0">
@@ -6290,7 +6769,7 @@
                 <a:ea typeface="Be Vietnam Pro" pitchFamily="34" charset="-122"/>
                 <a:cs typeface="Be Vietnam Pro" pitchFamily="34" charset="-120"/>
               </a:rPr>
-              <a:t> Bob</a:t>
+              <a:t> trừ</a:t>
             </a:r>
             <a:endParaRPr lang="en-US" sz="1950" dirty="0"/>
           </a:p>
@@ -6298,14 +6777,14 @@
       </p:sp>
       <p:sp>
         <p:nvSpPr>
-          <p:cNvPr id="18" name="Connector line-1792380649932-675938440"/>
-          <p:cNvSpPr/>
-          <p:nvPr/>
-        </p:nvSpPr>
-        <p:spPr>
-          <a:xfrm>
-            <a:off x="9144000" y="6858000"/>
-            <a:ext cx="5753100" cy="0"/>
+          <p:cNvPr id="30" name="Connector line-1792400517164-574453902"/>
+          <p:cNvSpPr/>
+          <p:nvPr/>
+        </p:nvSpPr>
+        <p:spPr>
+          <a:xfrm>
+            <a:off x="6953250" y="6800850"/>
+            <a:ext cx="8305800" cy="0"/>
           </a:xfrm>
           <a:prstGeom prst="line">
             <a:avLst/>
@@ -6317,58 +6796,20 @@
             </a:solidFill>
             <a:prstDash val="solid"/>
             <a:headEnd type="none"/>
-            <a:tailEnd type="none"/>
+            <a:tailEnd type="triangle" w="lg" len="lg"/>
           </a:ln>
         </p:spPr>
       </p:sp>
       <p:sp>
         <p:nvSpPr>
-          <p:cNvPr id="19" name="Shape 17"/>
-          <p:cNvSpPr/>
-          <p:nvPr/>
-        </p:nvSpPr>
-        <p:spPr>
-          <a:xfrm>
-            <a:off x="14878050" y="6743700"/>
-            <a:ext cx="209550" cy="228600"/>
-          </a:xfrm>
-          <a:custGeom>
-            <a:avLst/>
-            <a:gdLst/>
-            <a:ahLst/>
-            <a:cxnLst/>
-            <a:rect l="l" t="t" r="r" b="b"/>
-            <a:pathLst>
-              <a:path w="209550" h="228600">
-                <a:moveTo>
-                  <a:pt x="209550" y="114300"/>
-                </a:moveTo>
-                <a:lnTo>
-                  <a:pt x="0" y="0"/>
-                </a:lnTo>
-                <a:lnTo>
-                  <a:pt x="0" y="228600"/>
-                </a:lnTo>
-                <a:close/>
-              </a:path>
-            </a:pathLst>
-          </a:custGeom>
-          <a:solidFill>
-            <a:srgbClr val="3DD6A0"/>
-          </a:solidFill>
-          <a:ln/>
-        </p:spPr>
-      </p:sp>
-      <p:sp>
-        <p:nvSpPr>
-          <p:cNvPr id="20" name="Text 18"/>
-          <p:cNvSpPr/>
-          <p:nvPr/>
-        </p:nvSpPr>
-        <p:spPr>
-          <a:xfrm>
-            <a:off x="3505200" y="7391400"/>
-            <a:ext cx="5334000" cy="342900"/>
+          <p:cNvPr id="31" name="Text 29"/>
+          <p:cNvSpPr/>
+          <p:nvPr/>
+        </p:nvSpPr>
+        <p:spPr>
+          <a:xfrm>
+            <a:off x="11334750" y="6438900"/>
+            <a:ext cx="3810000" cy="323850"/>
           </a:xfrm>
           <a:prstGeom prst="rect">
             <a:avLst/>
@@ -6384,15 +6825,15 @@
               <a:buNone/>
             </a:pPr>
             <a:r>
-              <a:rPr lang="en-US" sz="1950" dirty="0" spc="1" kern="0">
-                <a:solidFill>
-                  <a:srgbClr val="F3EEE3"/>
-                </a:solidFill>
-                <a:latin typeface="Be Vietnam Pro" pitchFamily="34" charset="0"/>
-                <a:ea typeface="Be Vietnam Pro" pitchFamily="34" charset="-122"/>
-                <a:cs typeface="Be Vietnam Pro" pitchFamily="34" charset="-120"/>
-              </a:rPr>
-              <a:t>Báo</a:t>
+              <a:rPr lang="en-US" sz="1950" dirty="0" spc="-65" kern="0">
+                <a:solidFill>
+                  <a:srgbClr val="F3EEE3"/>
+                </a:solidFill>
+                <a:latin typeface="Be Vietnam Pro" pitchFamily="34" charset="0"/>
+                <a:ea typeface="Be Vietnam Pro" pitchFamily="34" charset="-122"/>
+                <a:cs typeface="Be Vietnam Pro" pitchFamily="34" charset="-120"/>
+              </a:rPr>
+              <a:t>Yêu</a:t>
             </a:r>
             <a:r>
               <a:rPr lang="en-US" sz="1950" dirty="0" spc="-1" kern="0">
@@ -6403,7 +6844,7 @@
                 <a:ea typeface="Be Vietnam Pro" pitchFamily="34" charset="-122"/>
                 <a:cs typeface="Be Vietnam Pro" pitchFamily="34" charset="-120"/>
               </a:rPr>
-              <a:t> thành</a:t>
+              <a:t> cầu</a:t>
             </a:r>
             <a:r>
               <a:rPr lang="en-US" sz="1950" dirty="0" spc="0" kern="0">
@@ -6414,7 +6855,29 @@
                 <a:ea typeface="Be Vietnam Pro" pitchFamily="34" charset="-122"/>
                 <a:cs typeface="Be Vietnam Pro" pitchFamily="34" charset="-120"/>
               </a:rPr>
-              <a:t> công</a:t>
+              <a:t> cộng</a:t>
+            </a:r>
+            <a:r>
+              <a:rPr lang="en-US" sz="1950" dirty="0" spc="3" kern="0">
+                <a:solidFill>
+                  <a:srgbClr val="F3EEE3"/>
+                </a:solidFill>
+                <a:latin typeface="Be Vietnam Pro" pitchFamily="34" charset="0"/>
+                <a:ea typeface="Be Vietnam Pro" pitchFamily="34" charset="-122"/>
+                <a:cs typeface="Be Vietnam Pro" pitchFamily="34" charset="-120"/>
+              </a:rPr>
+              <a:t> 100</a:t>
+            </a:r>
+            <a:r>
+              <a:rPr lang="en-US" sz="1950" dirty="0" spc="-2" kern="0">
+                <a:solidFill>
+                  <a:srgbClr val="F3EEE3"/>
+                </a:solidFill>
+                <a:latin typeface="Be Vietnam Pro" pitchFamily="34" charset="0"/>
+                <a:ea typeface="Be Vietnam Pro" pitchFamily="34" charset="-122"/>
+                <a:cs typeface="Be Vietnam Pro" pitchFamily="34" charset="-120"/>
+              </a:rPr>
+              <a:t> rupee</a:t>
             </a:r>
             <a:endParaRPr lang="en-US" sz="1950" dirty="0"/>
           </a:p>
@@ -6422,14 +6885,106 @@
       </p:sp>
       <p:sp>
         <p:nvSpPr>
-          <p:cNvPr id="21" name="Connector line-1792380649935-894596531"/>
-          <p:cNvSpPr/>
-          <p:nvPr/>
-        </p:nvSpPr>
-        <p:spPr>
-          <a:xfrm>
-            <a:off x="3390900" y="7810500"/>
-            <a:ext cx="5753100" cy="0"/>
+          <p:cNvPr id="32" name="Text 30"/>
+          <p:cNvSpPr/>
+          <p:nvPr/>
+        </p:nvSpPr>
+        <p:spPr>
+          <a:xfrm>
+            <a:off x="13525500" y="7067550"/>
+            <a:ext cx="3619500" cy="533400"/>
+          </a:xfrm>
+          <a:prstGeom prst="roundRect">
+            <a:avLst>
+              <a:gd name="adj" fmla="val 35714"/>
+            </a:avLst>
+          </a:prstGeom>
+          <a:solidFill>
+            <a:srgbClr val="1E212B"/>
+          </a:solidFill>
+          <a:ln w="28575">
+            <a:solidFill>
+              <a:srgbClr val="3DD6A0"/>
+            </a:solidFill>
+            <a:prstDash val="solid"/>
+          </a:ln>
+        </p:spPr>
+        <p:txBody>
+          <a:bodyPr wrap="square" lIns="0" tIns="0" rIns="0" bIns="0" rtlCol="0" anchor="ctr"/>
+          <a:lstStyle/>
+          <a:p>
+            <a:pPr algn="ctr" indent="0" marL="0">
+              <a:buNone/>
+            </a:pPr>
+            <a:r>
+              <a:rPr lang="en-US" sz="1800" b="1" dirty="0" spc="-3" kern="0">
+                <a:solidFill>
+                  <a:srgbClr val="3DD6A0"/>
+                </a:solidFill>
+                <a:latin typeface="Be Vietnam Pro" pitchFamily="34" charset="0"/>
+                <a:ea typeface="Be Vietnam Pro" pitchFamily="34" charset="-122"/>
+                <a:cs typeface="Be Vietnam Pro" pitchFamily="34" charset="-120"/>
+              </a:rPr>
+              <a:t>Bob</a:t>
+            </a:r>
+            <a:r>
+              <a:rPr lang="en-US" sz="1800" b="1" dirty="0" spc="8" kern="0">
+                <a:solidFill>
+                  <a:srgbClr val="3DD6A0"/>
+                </a:solidFill>
+                <a:latin typeface="Be Vietnam Pro" pitchFamily="34" charset="0"/>
+                <a:ea typeface="Be Vietnam Pro" pitchFamily="34" charset="-122"/>
+                <a:cs typeface="Be Vietnam Pro" pitchFamily="34" charset="-120"/>
+              </a:rPr>
+              <a:t> được</a:t>
+            </a:r>
+            <a:r>
+              <a:rPr lang="en-US" sz="1800" b="1" dirty="0" spc="-8" kern="0">
+                <a:solidFill>
+                  <a:srgbClr val="3DD6A0"/>
+                </a:solidFill>
+                <a:latin typeface="Be Vietnam Pro" pitchFamily="34" charset="0"/>
+                <a:ea typeface="Be Vietnam Pro" pitchFamily="34" charset="-122"/>
+                <a:cs typeface="Be Vietnam Pro" pitchFamily="34" charset="-120"/>
+              </a:rPr>
+              <a:t> cộng</a:t>
+            </a:r>
+            <a:r>
+              <a:rPr lang="en-US" sz="1800" b="1" dirty="0" spc="-1" kern="0">
+                <a:solidFill>
+                  <a:srgbClr val="3DD6A0"/>
+                </a:solidFill>
+                <a:latin typeface="Be Vietnam Pro" pitchFamily="34" charset="0"/>
+                <a:ea typeface="Be Vietnam Pro" pitchFamily="34" charset="-122"/>
+                <a:cs typeface="Be Vietnam Pro" pitchFamily="34" charset="-120"/>
+              </a:rPr>
+              <a:t> 100</a:t>
+            </a:r>
+            <a:r>
+              <a:rPr lang="en-US" sz="1800" b="1" dirty="0" spc="-3" kern="0">
+                <a:solidFill>
+                  <a:srgbClr val="3DD6A0"/>
+                </a:solidFill>
+                <a:latin typeface="Be Vietnam Pro" pitchFamily="34" charset="0"/>
+                <a:ea typeface="Be Vietnam Pro" pitchFamily="34" charset="-122"/>
+                <a:cs typeface="Be Vietnam Pro" pitchFamily="34" charset="-120"/>
+              </a:rPr>
+              <a:t> rupee</a:t>
+            </a:r>
+            <a:endParaRPr lang="en-US" sz="1800" dirty="0"/>
+          </a:p>
+        </p:txBody>
+      </p:sp>
+      <p:sp>
+        <p:nvSpPr>
+          <p:cNvPr id="33" name="Connector line-1792400517168-133963386"/>
+          <p:cNvSpPr/>
+          <p:nvPr/>
+        </p:nvSpPr>
+        <p:spPr>
+          <a:xfrm flipH="1">
+            <a:off x="7029450" y="7962900"/>
+            <a:ext cx="8305800" cy="0"/>
           </a:xfrm>
           <a:prstGeom prst="line">
             <a:avLst/>
@@ -6441,258 +6996,20 @@
             </a:solidFill>
             <a:prstDash val="solid"/>
             <a:headEnd type="none"/>
-            <a:tailEnd type="none"/>
+            <a:tailEnd type="triangle" w="lg" len="lg"/>
           </a:ln>
         </p:spPr>
       </p:sp>
       <p:sp>
         <p:nvSpPr>
-          <p:cNvPr id="22" name="Shape 20"/>
-          <p:cNvSpPr/>
-          <p:nvPr/>
-        </p:nvSpPr>
-        <p:spPr>
-          <a:xfrm>
-            <a:off x="3200400" y="7696200"/>
-            <a:ext cx="209550" cy="228600"/>
-          </a:xfrm>
-          <a:custGeom>
-            <a:avLst/>
-            <a:gdLst/>
-            <a:ahLst/>
-            <a:cxnLst/>
-            <a:rect l="l" t="t" r="r" b="b"/>
-            <a:pathLst>
-              <a:path w="209550" h="228600">
-                <a:moveTo>
-                  <a:pt x="0" y="114300"/>
-                </a:moveTo>
-                <a:lnTo>
-                  <a:pt x="209550" y="0"/>
-                </a:lnTo>
-                <a:lnTo>
-                  <a:pt x="209550" y="228600"/>
-                </a:lnTo>
-                <a:close/>
-              </a:path>
-            </a:pathLst>
-          </a:custGeom>
-          <a:solidFill>
-            <a:srgbClr val="FFB454"/>
-          </a:solidFill>
-          <a:ln/>
-        </p:spPr>
-      </p:sp>
-      <p:sp>
-        <p:nvSpPr>
-          <p:cNvPr id="23" name="Shape 21"/>
-          <p:cNvSpPr/>
-          <p:nvPr/>
-        </p:nvSpPr>
-        <p:spPr>
-          <a:xfrm>
-            <a:off x="933450" y="9429750"/>
-            <a:ext cx="114300" cy="114300"/>
-          </a:xfrm>
-          <a:prstGeom prst="ellipse">
-            <a:avLst/>
-          </a:prstGeom>
-          <a:solidFill>
-            <a:srgbClr val="F3EEE3"/>
-          </a:solidFill>
-          <a:ln w="19050">
-            <a:solidFill>
-              <a:srgbClr val="F3EEE3"/>
-            </a:solidFill>
-            <a:prstDash val="solid"/>
-          </a:ln>
-        </p:spPr>
-      </p:sp>
-      <p:sp>
-        <p:nvSpPr>
-          <p:cNvPr id="24" name="Shape 22"/>
-          <p:cNvSpPr/>
-          <p:nvPr/>
-        </p:nvSpPr>
-        <p:spPr>
-          <a:xfrm>
-            <a:off x="1257300" y="9429750"/>
-            <a:ext cx="114300" cy="114300"/>
-          </a:xfrm>
-          <a:prstGeom prst="ellipse">
-            <a:avLst/>
-          </a:prstGeom>
-          <a:solidFill>
-            <a:srgbClr val="F3EEE3"/>
-          </a:solidFill>
-          <a:ln w="19050">
-            <a:solidFill>
-              <a:srgbClr val="F3EEE3"/>
-            </a:solidFill>
-            <a:prstDash val="solid"/>
-          </a:ln>
-        </p:spPr>
-      </p:sp>
-      <p:sp>
-        <p:nvSpPr>
-          <p:cNvPr id="25" name="Shape 23"/>
-          <p:cNvSpPr/>
-          <p:nvPr/>
-        </p:nvSpPr>
-        <p:spPr>
-          <a:xfrm>
-            <a:off x="1581150" y="9429750"/>
-            <a:ext cx="114300" cy="114300"/>
-          </a:xfrm>
-          <a:prstGeom prst="ellipse">
-            <a:avLst/>
-          </a:prstGeom>
-          <a:solidFill>
-            <a:srgbClr val="F3EEE3"/>
-          </a:solidFill>
-          <a:ln w="19050">
-            <a:solidFill>
-              <a:srgbClr val="F3EEE3"/>
-            </a:solidFill>
-            <a:prstDash val="solid"/>
-          </a:ln>
-        </p:spPr>
-      </p:sp>
-      <p:sp>
-        <p:nvSpPr>
-          <p:cNvPr id="26" name="Shape 24"/>
-          <p:cNvSpPr/>
-          <p:nvPr/>
-        </p:nvSpPr>
-        <p:spPr>
-          <a:xfrm>
-            <a:off x="1866900" y="9391650"/>
-            <a:ext cx="190500" cy="190500"/>
-          </a:xfrm>
-          <a:prstGeom prst="ellipse">
-            <a:avLst/>
-          </a:prstGeom>
-          <a:solidFill>
-            <a:srgbClr val="FF6A4D"/>
-          </a:solidFill>
-          <a:ln w="19050">
-            <a:solidFill>
-              <a:srgbClr val="FF6A4D"/>
-            </a:solidFill>
-            <a:prstDash val="solid"/>
-          </a:ln>
-        </p:spPr>
-      </p:sp>
-      <p:sp>
-        <p:nvSpPr>
-          <p:cNvPr id="27" name="Shape 25"/>
-          <p:cNvSpPr/>
-          <p:nvPr/>
-        </p:nvSpPr>
-        <p:spPr>
-          <a:xfrm>
-            <a:off x="2228850" y="9429750"/>
-            <a:ext cx="114300" cy="114300"/>
-          </a:xfrm>
-          <a:prstGeom prst="ellipse">
-            <a:avLst/>
-          </a:prstGeom>
-          <a:solidFill>
-            <a:srgbClr val="14161C"/>
-          </a:solidFill>
-          <a:ln w="19050">
-            <a:solidFill>
-              <a:srgbClr val="8A867C"/>
-            </a:solidFill>
-            <a:prstDash val="solid"/>
-          </a:ln>
-        </p:spPr>
-      </p:sp>
-      <p:sp>
-        <p:nvSpPr>
-          <p:cNvPr id="28" name="Shape 26"/>
-          <p:cNvSpPr/>
-          <p:nvPr/>
-        </p:nvSpPr>
-        <p:spPr>
-          <a:xfrm>
-            <a:off x="2552700" y="9429750"/>
-            <a:ext cx="114300" cy="114300"/>
-          </a:xfrm>
-          <a:prstGeom prst="ellipse">
-            <a:avLst/>
-          </a:prstGeom>
-          <a:solidFill>
-            <a:srgbClr val="14161C"/>
-          </a:solidFill>
-          <a:ln w="19050">
-            <a:solidFill>
-              <a:srgbClr val="8A867C"/>
-            </a:solidFill>
-            <a:prstDash val="solid"/>
-          </a:ln>
-        </p:spPr>
-      </p:sp>
-      <p:sp>
-        <p:nvSpPr>
-          <p:cNvPr id="29" name="Shape 27"/>
-          <p:cNvSpPr/>
-          <p:nvPr/>
-        </p:nvSpPr>
-        <p:spPr>
-          <a:xfrm>
-            <a:off x="2876550" y="9429750"/>
-            <a:ext cx="114300" cy="114300"/>
-          </a:xfrm>
-          <a:prstGeom prst="ellipse">
-            <a:avLst/>
-          </a:prstGeom>
-          <a:solidFill>
-            <a:srgbClr val="14161C"/>
-          </a:solidFill>
-          <a:ln w="19050">
-            <a:solidFill>
-              <a:srgbClr val="8A867C"/>
-            </a:solidFill>
-            <a:prstDash val="solid"/>
-          </a:ln>
-        </p:spPr>
-      </p:sp>
-      <p:sp>
-        <p:nvSpPr>
-          <p:cNvPr id="30" name="Shape 28"/>
-          <p:cNvSpPr/>
-          <p:nvPr/>
-        </p:nvSpPr>
-        <p:spPr>
-          <a:xfrm>
-            <a:off x="3200400" y="9429750"/>
-            <a:ext cx="114300" cy="114300"/>
-          </a:xfrm>
-          <a:prstGeom prst="ellipse">
-            <a:avLst/>
-          </a:prstGeom>
-          <a:solidFill>
-            <a:srgbClr val="14161C"/>
-          </a:solidFill>
-          <a:ln w="19050">
-            <a:solidFill>
-              <a:srgbClr val="8A867C"/>
-            </a:solidFill>
-            <a:prstDash val="solid"/>
-          </a:ln>
-        </p:spPr>
-      </p:sp>
-      <p:sp>
-        <p:nvSpPr>
-          <p:cNvPr id="31" name="Text 29"/>
-          <p:cNvSpPr/>
-          <p:nvPr/>
-        </p:nvSpPr>
-        <p:spPr>
-          <a:xfrm>
-            <a:off x="914400" y="9715500"/>
-            <a:ext cx="6667500" cy="285750"/>
+          <p:cNvPr id="34" name="Text 32"/>
+          <p:cNvSpPr/>
+          <p:nvPr/>
+        </p:nvSpPr>
+        <p:spPr>
+          <a:xfrm>
+            <a:off x="11334750" y="7600950"/>
+            <a:ext cx="3810000" cy="323850"/>
           </a:xfrm>
           <a:prstGeom prst="rect">
             <a:avLst/>
@@ -6704,104 +7021,146 @@
           <a:bodyPr wrap="square" lIns="0" tIns="0" rIns="0" bIns="0" rtlCol="0" anchor="t"/>
           <a:lstStyle/>
           <a:p>
-            <a:pPr algn="l" indent="0" marL="0">
+            <a:pPr algn="ctr" indent="0" marL="0">
               <a:buNone/>
             </a:pPr>
             <a:r>
-              <a:rPr lang="en-US" sz="1650" dirty="0" spc="-12" kern="0">
-                <a:solidFill>
-                  <a:srgbClr val="9AA0B5"/>
-                </a:solidFill>
-                <a:latin typeface="Be Vietnam Pro" pitchFamily="34" charset="0"/>
-                <a:ea typeface="Be Vietnam Pro" pitchFamily="34" charset="-122"/>
-                <a:cs typeface="Be Vietnam Pro" pitchFamily="34" charset="-120"/>
-              </a:rPr>
-              <a:t>System</a:t>
-            </a:r>
-            <a:r>
-              <a:rPr lang="en-US" sz="1650" dirty="0" spc="0" kern="0">
-                <a:solidFill>
-                  <a:srgbClr val="9AA0B5"/>
-                </a:solidFill>
-                <a:latin typeface="Be Vietnam Pro" pitchFamily="34" charset="0"/>
-                <a:ea typeface="Be Vietnam Pro" pitchFamily="34" charset="-122"/>
-                <a:cs typeface="Be Vietnam Pro" pitchFamily="34" charset="-120"/>
-              </a:rPr>
-              <a:t> Design</a:t>
-            </a:r>
-            <a:r>
-              <a:rPr lang="en-US" sz="1650" dirty="0" spc="1" kern="0">
-                <a:solidFill>
-                  <a:srgbClr val="9AA0B5"/>
-                </a:solidFill>
-                <a:latin typeface="Be Vietnam Pro" pitchFamily="34" charset="0"/>
-                <a:ea typeface="Be Vietnam Pro" pitchFamily="34" charset="-122"/>
-                <a:cs typeface="Be Vietnam Pro" pitchFamily="34" charset="-120"/>
-              </a:rPr>
-              <a:t> 101</a:t>
-            </a:r>
-            <a:r>
-              <a:rPr lang="en-US" sz="1650" dirty="0" spc="0" kern="0">
-                <a:solidFill>
-                  <a:srgbClr val="9AA0B5"/>
-                </a:solidFill>
-                <a:latin typeface="Be Vietnam Pro" pitchFamily="34" charset="0"/>
-                <a:ea typeface="Be Vietnam Pro" pitchFamily="34" charset="-122"/>
-                <a:cs typeface="Be Vietnam Pro" pitchFamily="34" charset="-120"/>
-              </a:rPr>
-              <a:t> ·</a:t>
-            </a:r>
-            <a:r>
-              <a:rPr lang="en-US" sz="1650" dirty="0" spc="1" kern="0">
-                <a:solidFill>
-                  <a:srgbClr val="9AA0B5"/>
-                </a:solidFill>
-                <a:latin typeface="Be Vietnam Pro" pitchFamily="34" charset="0"/>
-                <a:ea typeface="Be Vietnam Pro" pitchFamily="34" charset="-122"/>
-                <a:cs typeface="Be Vietnam Pro" pitchFamily="34" charset="-120"/>
-              </a:rPr>
-              <a:t> Bài</a:t>
-            </a:r>
-            <a:r>
-              <a:rPr lang="en-US" sz="1650" dirty="0" spc="2" kern="0">
-                <a:solidFill>
-                  <a:srgbClr val="9AA0B5"/>
-                </a:solidFill>
-                <a:latin typeface="Be Vietnam Pro" pitchFamily="34" charset="0"/>
-                <a:ea typeface="Be Vietnam Pro" pitchFamily="34" charset="-122"/>
-                <a:cs typeface="Be Vietnam Pro" pitchFamily="34" charset="-120"/>
-              </a:rPr>
-              <a:t> 09</a:t>
-            </a:r>
-            <a:r>
-              <a:rPr lang="en-US" sz="1650" dirty="0" spc="-1" kern="0">
-                <a:solidFill>
-                  <a:srgbClr val="9AA0B5"/>
-                </a:solidFill>
-                <a:latin typeface="Be Vietnam Pro" pitchFamily="34" charset="0"/>
-                <a:ea typeface="Be Vietnam Pro" pitchFamily="34" charset="-122"/>
-                <a:cs typeface="Be Vietnam Pro" pitchFamily="34" charset="-120"/>
-              </a:rPr>
-              <a:t> ·</a:t>
-            </a:r>
-            <a:r>
-              <a:rPr lang="en-US" sz="1650" dirty="0" spc="1" kern="0">
-                <a:solidFill>
-                  <a:srgbClr val="9AA0B5"/>
-                </a:solidFill>
-                <a:latin typeface="Be Vietnam Pro" pitchFamily="34" charset="0"/>
-                <a:ea typeface="Be Vietnam Pro" pitchFamily="34" charset="-122"/>
-                <a:cs typeface="Be Vietnam Pro" pitchFamily="34" charset="-120"/>
-              </a:rPr>
-              <a:t> 04/08</a:t>
-            </a:r>
-            <a:endParaRPr lang="en-US" sz="1650" dirty="0"/>
+              <a:rPr lang="en-US" sz="1950" dirty="0" spc="-27" kern="0">
+                <a:solidFill>
+                  <a:srgbClr val="F3EEE3"/>
+                </a:solidFill>
+                <a:latin typeface="Be Vietnam Pro" pitchFamily="34" charset="0"/>
+                <a:ea typeface="Be Vietnam Pro" pitchFamily="34" charset="-122"/>
+                <a:cs typeface="Be Vietnam Pro" pitchFamily="34" charset="-120"/>
+              </a:rPr>
+              <a:t>Xác</a:t>
+            </a:r>
+            <a:r>
+              <a:rPr lang="en-US" sz="1950" dirty="0" spc="1" kern="0">
+                <a:solidFill>
+                  <a:srgbClr val="F3EEE3"/>
+                </a:solidFill>
+                <a:latin typeface="Be Vietnam Pro" pitchFamily="34" charset="0"/>
+                <a:ea typeface="Be Vietnam Pro" pitchFamily="34" charset="-122"/>
+                <a:cs typeface="Be Vietnam Pro" pitchFamily="34" charset="-120"/>
+              </a:rPr>
+              <a:t> nhận</a:t>
+            </a:r>
+            <a:r>
+              <a:rPr lang="en-US" sz="1950" dirty="0" spc="14" kern="0">
+                <a:solidFill>
+                  <a:srgbClr val="F3EEE3"/>
+                </a:solidFill>
+                <a:latin typeface="Be Vietnam Pro" pitchFamily="34" charset="0"/>
+                <a:ea typeface="Be Vietnam Pro" pitchFamily="34" charset="-122"/>
+                <a:cs typeface="Be Vietnam Pro" pitchFamily="34" charset="-120"/>
+              </a:rPr>
+              <a:t> đã</a:t>
+            </a:r>
+            <a:r>
+              <a:rPr lang="en-US" sz="1950" dirty="0" spc="0" kern="0">
+                <a:solidFill>
+                  <a:srgbClr val="F3EEE3"/>
+                </a:solidFill>
+                <a:latin typeface="Be Vietnam Pro" pitchFamily="34" charset="0"/>
+                <a:ea typeface="Be Vietnam Pro" pitchFamily="34" charset="-122"/>
+                <a:cs typeface="Be Vietnam Pro" pitchFamily="34" charset="-120"/>
+              </a:rPr>
+              <a:t> cộng</a:t>
+            </a:r>
+            <a:endParaRPr lang="en-US" sz="1950" dirty="0"/>
           </a:p>
         </p:txBody>
       </p:sp>
       <p:sp>
         <p:nvSpPr>
-          <p:cNvPr id="32" name="Shape 30"/>
+          <p:cNvPr id="35" name="Connector line-1792400517170-651931153"/>
+          <p:cNvSpPr/>
+          <p:nvPr/>
+        </p:nvSpPr>
+        <p:spPr>
+          <a:xfrm flipH="1">
+            <a:off x="2838450" y="8572500"/>
+            <a:ext cx="4114800" cy="0"/>
+          </a:xfrm>
+          <a:prstGeom prst="line">
+            <a:avLst/>
+          </a:prstGeom>
+          <a:noFill/>
+          <a:ln w="38100">
+            <a:solidFill>
+              <a:srgbClr val="FFB454"/>
+            </a:solidFill>
+            <a:prstDash val="solid"/>
+            <a:headEnd type="none"/>
+            <a:tailEnd type="triangle" w="lg" len="lg"/>
+          </a:ln>
+        </p:spPr>
+      </p:sp>
+      <p:sp>
+        <p:nvSpPr>
+          <p:cNvPr id="36" name="Text 34"/>
+          <p:cNvSpPr/>
+          <p:nvPr/>
+        </p:nvSpPr>
+        <p:spPr>
+          <a:xfrm>
+            <a:off x="2762250" y="8210550"/>
+            <a:ext cx="4191000" cy="323850"/>
+          </a:xfrm>
+          <a:prstGeom prst="rect">
+            <a:avLst/>
+          </a:prstGeom>
+          <a:noFill/>
+          <a:ln/>
+        </p:spPr>
+        <p:txBody>
+          <a:bodyPr wrap="square" lIns="0" tIns="0" rIns="0" bIns="0" rtlCol="0" anchor="t"/>
+          <a:lstStyle/>
+          <a:p>
+            <a:pPr algn="ctr" indent="0" marL="0">
+              <a:buNone/>
+            </a:pPr>
+            <a:r>
+              <a:rPr lang="en-US" sz="1950" dirty="0" spc="1" kern="0">
+                <a:solidFill>
+                  <a:srgbClr val="F3EEE3"/>
+                </a:solidFill>
+                <a:latin typeface="Be Vietnam Pro" pitchFamily="34" charset="0"/>
+                <a:ea typeface="Be Vietnam Pro" pitchFamily="34" charset="-122"/>
+                <a:cs typeface="Be Vietnam Pro" pitchFamily="34" charset="-120"/>
+              </a:rPr>
+              <a:t>Báo</a:t>
+            </a:r>
+            <a:r>
+              <a:rPr lang="en-US" sz="1950" dirty="0" spc="-1" kern="0">
+                <a:solidFill>
+                  <a:srgbClr val="F3EEE3"/>
+                </a:solidFill>
+                <a:latin typeface="Be Vietnam Pro" pitchFamily="34" charset="0"/>
+                <a:ea typeface="Be Vietnam Pro" pitchFamily="34" charset="-122"/>
+                <a:cs typeface="Be Vietnam Pro" pitchFamily="34" charset="-120"/>
+              </a:rPr>
+              <a:t> thành</a:t>
+            </a:r>
+            <a:r>
+              <a:rPr lang="en-US" sz="1950" dirty="0" spc="0" kern="0">
+                <a:solidFill>
+                  <a:srgbClr val="F3EEE3"/>
+                </a:solidFill>
+                <a:latin typeface="Be Vietnam Pro" pitchFamily="34" charset="0"/>
+                <a:ea typeface="Be Vietnam Pro" pitchFamily="34" charset="-122"/>
+                <a:cs typeface="Be Vietnam Pro" pitchFamily="34" charset="-120"/>
+              </a:rPr>
+              <a:t> công</a:t>
+            </a:r>
+            <a:endParaRPr lang="en-US" sz="1950" dirty="0"/>
+          </a:p>
+        </p:txBody>
+      </p:sp>
+      <p:sp>
+        <p:nvSpPr>
+          <p:cNvPr id="37" name="Shape 35"/>
           <p:cNvSpPr/>
           <p:nvPr/>
         </p:nvSpPr>
@@ -6825,7 +7184,7 @@
       </p:sp>
       <p:pic>
         <p:nvPicPr>
-          <p:cNvPr id="33" name="Moda image moda-export-watermark-86470f09-bbf8-4bf8-aaa5-35211117e948" descr="">    </p:cNvPr>
+          <p:cNvPr id="38" name="Moda image moda-export-watermark-86470f09-bbf8-4bf8-aaa5-35211117e948" descr="">    </p:cNvPr>
           <p:cNvPicPr>
             <a:picLocks noChangeAspect="1"/>
           </p:cNvPicPr>

--- a/system-design-101/vi/lessons/sd-07-009/slides/sd-07-009.pptx
+++ b/system-design-101/vi/lessons/sd-07-009/slides/sd-07-009.pptx
@@ -2339,6 +2339,17 @@
               <a:buNone/>
             </a:pPr>
             <a:r>
+              <a:rPr lang="en-US" sz="2100" b="1" dirty="0" spc="-5" kern="0">
+                <a:solidFill>
+                  <a:srgbClr val="FFB454"/>
+                </a:solidFill>
+                <a:latin typeface="Be Vietnam Pro" pitchFamily="34" charset="0"/>
+                <a:ea typeface="Be Vietnam Pro" pitchFamily="34" charset="-122"/>
+                <a:cs typeface="Be Vietnam Pro" pitchFamily="34" charset="-120"/>
+              </a:rPr>
+              <a:t>Ngân</a:t>
+            </a:r>
+            <a:r>
               <a:rPr lang="en-US" sz="2100" b="1" dirty="0" spc="-3" kern="0">
                 <a:solidFill>
                   <a:srgbClr val="FFB454"/>
@@ -2347,7 +2358,7 @@
                 <a:ea typeface="Be Vietnam Pro" pitchFamily="34" charset="-122"/>
                 <a:cs typeface="Be Vietnam Pro" pitchFamily="34" charset="-120"/>
               </a:rPr>
-              <a:t>Alice</a:t>
+              <a:t> hàng của Alice</a:t>
             </a:r>
             <a:endParaRPr lang="en-US" sz="2100" dirty="0"/>
           </a:p>
@@ -10484,7 +10495,7 @@
               <a:buNone/>
             </a:pPr>
             <a:r>
-              <a:rPr lang="en-US" sz="1950" dirty="0" spc="5" kern="0">
+              <a:rPr lang="en-US" sz="1950" dirty="0" spc="0" kern="0">
                 <a:solidFill>
                   <a:srgbClr val="6B6A66"/>
                 </a:solidFill>
@@ -10492,7 +10503,106 @@
                 <a:ea typeface="Be Vietnam Pro" pitchFamily="34" charset="-122"/>
                 <a:cs typeface="Be Vietnam Pro" pitchFamily="34" charset="-120"/>
               </a:rPr>
-              <a:t>Bước</a:t>
+              <a:t>Hình</a:t>
+            </a:r>
+            <a:r>
+              <a:rPr lang="en-US" sz="1950" dirty="0" spc="-14" kern="0">
+                <a:solidFill>
+                  <a:srgbClr val="6B6A66"/>
+                </a:solidFill>
+                <a:latin typeface="Be Vietnam Pro" pitchFamily="34" charset="0"/>
+                <a:ea typeface="Be Vietnam Pro" pitchFamily="34" charset="-122"/>
+                <a:cs typeface="Be Vietnam Pro" pitchFamily="34" charset="-120"/>
+              </a:rPr>
+              <a:t> vẽ</a:t>
+            </a:r>
+            <a:r>
+              <a:rPr lang="en-US" sz="1950" dirty="0" spc="-3" kern="0">
+                <a:solidFill>
+                  <a:srgbClr val="6B6A66"/>
+                </a:solidFill>
+                <a:latin typeface="Be Vietnam Pro" pitchFamily="34" charset="0"/>
+                <a:ea typeface="Be Vietnam Pro" pitchFamily="34" charset="-122"/>
+                <a:cs typeface="Be Vietnam Pro" pitchFamily="34" charset="-120"/>
+              </a:rPr>
+              <a:t> cả</a:t>
+            </a:r>
+            <a:r>
+              <a:rPr lang="en-US" sz="1950" dirty="0" spc="1" kern="0">
+                <a:solidFill>
+                  <a:srgbClr val="6B6A66"/>
+                </a:solidFill>
+                <a:latin typeface="Be Vietnam Pro" pitchFamily="34" charset="0"/>
+                <a:ea typeface="Be Vietnam Pro" pitchFamily="34" charset="-122"/>
+                <a:cs typeface="Be Vietnam Pro" pitchFamily="34" charset="-120"/>
+              </a:rPr>
+              <a:t> hai</a:t>
+            </a:r>
+            <a:r>
+              <a:rPr lang="en-US" sz="1950" dirty="0" spc="-6" kern="0">
+                <a:solidFill>
+                  <a:srgbClr val="6B6A66"/>
+                </a:solidFill>
+                <a:latin typeface="Be Vietnam Pro" pitchFamily="34" charset="0"/>
+                <a:ea typeface="Be Vietnam Pro" pitchFamily="34" charset="-122"/>
+                <a:cs typeface="Be Vietnam Pro" pitchFamily="34" charset="-120"/>
+              </a:rPr>
+              <a:t> ngân</a:t>
+            </a:r>
+            <a:r>
+              <a:rPr lang="en-US" sz="1950" dirty="0" spc="1" kern="0">
+                <a:solidFill>
+                  <a:srgbClr val="6B6A66"/>
+                </a:solidFill>
+                <a:latin typeface="Be Vietnam Pro" pitchFamily="34" charset="0"/>
+                <a:ea typeface="Be Vietnam Pro" pitchFamily="34" charset="-122"/>
+                <a:cs typeface="Be Vietnam Pro" pitchFamily="34" charset="-120"/>
+              </a:rPr>
+              <a:t> hàng;</a:t>
+            </a:r>
+            <a:r>
+              <a:rPr lang="en-US" sz="1950" dirty="0" spc="3" kern="0">
+                <a:solidFill>
+                  <a:srgbClr val="6B6A66"/>
+                </a:solidFill>
+                <a:latin typeface="Be Vietnam Pro" pitchFamily="34" charset="0"/>
+                <a:ea typeface="Be Vietnam Pro" pitchFamily="34" charset="-122"/>
+                <a:cs typeface="Be Vietnam Pro" pitchFamily="34" charset="-120"/>
+              </a:rPr>
+              <a:t> bước</a:t>
+            </a:r>
+            <a:r>
+              <a:rPr lang="en-US" sz="1950" dirty="0" spc="22" kern="0">
+                <a:solidFill>
+                  <a:srgbClr val="6B6A66"/>
+                </a:solidFill>
+                <a:latin typeface="Be Vietnam Pro" pitchFamily="34" charset="0"/>
+                <a:ea typeface="Be Vietnam Pro" pitchFamily="34" charset="-122"/>
+                <a:cs typeface="Be Vietnam Pro" pitchFamily="34" charset="-120"/>
+              </a:rPr>
+              <a:t> ứng</a:t>
+            </a:r>
+            <a:r>
+              <a:rPr lang="en-US" sz="1950" dirty="0" spc="1" kern="0">
+                <a:solidFill>
+                  <a:srgbClr val="6B6A66"/>
+                </a:solidFill>
+                <a:latin typeface="Be Vietnam Pro" pitchFamily="34" charset="0"/>
+                <a:ea typeface="Be Vietnam Pro" pitchFamily="34" charset="-122"/>
+                <a:cs typeface="Be Vietnam Pro" pitchFamily="34" charset="-120"/>
+              </a:rPr>
+              <a:t> dụng</a:t>
+            </a:r>
+            <a:r>
+              <a:rPr lang="en-US" sz="1950" dirty="0" spc="34" kern="0">
+                <a:solidFill>
+                  <a:srgbClr val="6B6A66"/>
+                </a:solidFill>
+                <a:latin typeface="Be Vietnam Pro" pitchFamily="34" charset="0"/>
+                <a:ea typeface="Be Vietnam Pro" pitchFamily="34" charset="-122"/>
+                <a:cs typeface="Be Vietnam Pro" pitchFamily="34" charset="-120"/>
+              </a:rPr>
+              <a:t> gửi</a:t>
             </a:r>
             <a:r>
               <a:rPr lang="en-US" sz="1950" dirty="0" spc="0" kern="0">
@@ -10503,10 +10613,10 @@
                 <a:ea typeface="Be Vietnam Pro" pitchFamily="34" charset="-122"/>
                 <a:cs typeface="Be Vietnam Pro" pitchFamily="34" charset="-120"/>
               </a:rPr>
-              <a:t> trừ</a:t>
-            </a:r>
-            <a:r>
-              <a:rPr lang="en-US" sz="1950" dirty="0" spc="1" kern="0">
+              <a:t> lệnh</a:t>
+            </a:r>
+            <a:r>
+              <a:rPr lang="en-US" sz="1950" dirty="0" spc="-15" kern="0">
                 <a:solidFill>
                   <a:srgbClr val="6B6A66"/>
                 </a:solidFill>
@@ -10514,7 +10624,7 @@
                 <a:ea typeface="Be Vietnam Pro" pitchFamily="34" charset="-122"/>
                 <a:cs typeface="Be Vietnam Pro" pitchFamily="34" charset="-120"/>
               </a:rPr>
-              <a:t> tiền</a:t>
+              <a:t> và</a:t>
             </a:r>
             <a:r>
               <a:rPr lang="en-US" sz="1950" dirty="0" spc="-3" kern="0">
@@ -10525,10 +10635,10 @@
                 <a:ea typeface="Be Vietnam Pro" pitchFamily="34" charset="-122"/>
                 <a:cs typeface="Be Vietnam Pro" pitchFamily="34" charset="-120"/>
               </a:rPr>
-              <a:t> ở</a:t>
-            </a:r>
-            <a:r>
-              <a:rPr lang="en-US" sz="1950" dirty="0" spc="-6" kern="0">
+              <a:t> báo</a:t>
+            </a:r>
+            <a:r>
+              <a:rPr lang="en-US" sz="1950" dirty="0" spc="-1" kern="0">
                 <a:solidFill>
                   <a:srgbClr val="6B6A66"/>
                 </a:solidFill>
@@ -10536,10 +10646,10 @@
                 <a:ea typeface="Be Vietnam Pro" pitchFamily="34" charset="-122"/>
                 <a:cs typeface="Be Vietnam Pro" pitchFamily="34" charset="-120"/>
               </a:rPr>
-              <a:t> ngân</a:t>
-            </a:r>
-            <a:r>
-              <a:rPr lang="en-US" sz="1950" dirty="0" spc="1" kern="0">
+              <a:t> thành</a:t>
+            </a:r>
+            <a:r>
+              <a:rPr lang="en-US" sz="1950" dirty="0" spc="0" kern="0">
                 <a:solidFill>
                   <a:srgbClr val="6B6A66"/>
                 </a:solidFill>
@@ -10547,10 +10657,10 @@
                 <a:ea typeface="Be Vietnam Pro" pitchFamily="34" charset="-122"/>
                 <a:cs typeface="Be Vietnam Pro" pitchFamily="34" charset="-120"/>
               </a:rPr>
-              <a:t> hàng</a:t>
-            </a:r>
-            <a:r>
-              <a:rPr lang="en-US" sz="1950" dirty="0" spc="0" kern="0">
+              <a:t> công</a:t>
+            </a:r>
+            <a:r>
+              <a:rPr lang="en-US" sz="1950" dirty="0" spc="-1" kern="0">
                 <a:solidFill>
                   <a:srgbClr val="6B6A66"/>
                 </a:solidFill>
@@ -10558,10 +10668,10 @@
                 <a:ea typeface="Be Vietnam Pro" pitchFamily="34" charset="-122"/>
                 <a:cs typeface="Be Vietnam Pro" pitchFamily="34" charset="-120"/>
               </a:rPr>
-              <a:t> của</a:t>
-            </a:r>
-            <a:r>
-              <a:rPr lang="en-US" sz="1950" dirty="0" spc="-1" kern="0">
+              <a:t> chỉ</a:t>
+            </a:r>
+            <a:r>
+              <a:rPr lang="en-US" sz="1950" dirty="0" spc="-4" kern="0">
                 <a:solidFill>
                   <a:srgbClr val="6B6A66"/>
                 </a:solidFill>
@@ -10569,10 +10679,10 @@
                 <a:ea typeface="Be Vietnam Pro" pitchFamily="34" charset="-122"/>
                 <a:cs typeface="Be Vietnam Pro" pitchFamily="34" charset="-120"/>
               </a:rPr>
-              <a:t> Alice</a:t>
-            </a:r>
-            <a:r>
-              <a:rPr lang="en-US" sz="1950" dirty="0" spc="-3" kern="0">
+              <a:t> có</a:t>
+            </a:r>
+            <a:r>
+              <a:rPr lang="en-US" sz="1950" dirty="0" spc="-11" kern="0">
                 <a:solidFill>
                   <a:srgbClr val="6B6A66"/>
                 </a:solidFill>
@@ -10580,10 +10690,10 @@
                 <a:ea typeface="Be Vietnam Pro" pitchFamily="34" charset="-122"/>
                 <a:cs typeface="Be Vietnam Pro" pitchFamily="34" charset="-120"/>
               </a:rPr>
-              <a:t> có</a:t>
-            </a:r>
-            <a:r>
-              <a:rPr lang="en-US" sz="1950" dirty="0" spc="-11" kern="0">
+              <a:t> trong</a:t>
+            </a:r>
+            <a:r>
+              <a:rPr lang="en-US" sz="1950" dirty="0" spc="-2" kern="0">
                 <a:solidFill>
                   <a:srgbClr val="6B6A66"/>
                 </a:solidFill>
@@ -10591,51 +10701,7 @@
                 <a:ea typeface="Be Vietnam Pro" pitchFamily="34" charset="-122"/>
                 <a:cs typeface="Be Vietnam Pro" pitchFamily="34" charset="-120"/>
               </a:rPr>
-              <a:t> trong</a:t>
-            </a:r>
-            <a:r>
-              <a:rPr lang="en-US" sz="1950" dirty="0" spc="-1" kern="0">
-                <a:solidFill>
-                  <a:srgbClr val="6B6A66"/>
-                </a:solidFill>
-                <a:latin typeface="Be Vietnam Pro" pitchFamily="34" charset="0"/>
-                <a:ea typeface="Be Vietnam Pro" pitchFamily="34" charset="-122"/>
-                <a:cs typeface="Be Vietnam Pro" pitchFamily="34" charset="-120"/>
-              </a:rPr>
-              <a:t> chữ,</a:t>
-            </a:r>
-            <a:r>
-              <a:rPr lang="en-US" sz="1950" dirty="0" spc="0" kern="0">
-                <a:solidFill>
-                  <a:srgbClr val="6B6A66"/>
-                </a:solidFill>
-                <a:latin typeface="Be Vietnam Pro" pitchFamily="34" charset="0"/>
-                <a:ea typeface="Be Vietnam Pro" pitchFamily="34" charset="-122"/>
-                <a:cs typeface="Be Vietnam Pro" pitchFamily="34" charset="-120"/>
-              </a:rPr>
-              <a:t> không</a:t>
-            </a:r>
-            <a:r>
-              <a:rPr lang="en-US" sz="1950" dirty="0" spc="-14" kern="0">
-                <a:solidFill>
-                  <a:srgbClr val="6B6A66"/>
-                </a:solidFill>
-                <a:latin typeface="Be Vietnam Pro" pitchFamily="34" charset="0"/>
-                <a:ea typeface="Be Vietnam Pro" pitchFamily="34" charset="-122"/>
-                <a:cs typeface="Be Vietnam Pro" pitchFamily="34" charset="-120"/>
-              </a:rPr>
-              <a:t> vẽ</a:t>
-            </a:r>
-            <a:r>
-              <a:rPr lang="en-US" sz="1950" dirty="0" spc="6" kern="0">
-                <a:solidFill>
-                  <a:srgbClr val="6B6A66"/>
-                </a:solidFill>
-                <a:latin typeface="Be Vietnam Pro" pitchFamily="34" charset="0"/>
-                <a:ea typeface="Be Vietnam Pro" pitchFamily="34" charset="-122"/>
-                <a:cs typeface="Be Vietnam Pro" pitchFamily="34" charset="-120"/>
-              </a:rPr>
-              <a:t> riêng.</a:t>
+              <a:t> chữ.</a:t>
             </a:r>
             <a:endParaRPr lang="en-US" sz="1950" dirty="0"/>
           </a:p>
